--- a/presentacion-lunes/Resumen_Riesgos_2026_Opcion_B.pptx
+++ b/presentacion-lunes/Resumen_Riesgos_2026_Opcion_B.pptx
@@ -579,7 +579,7 @@
           <a:lstStyle/>
           <a:p>
             <a:r>
-              <a:t>Resumen de lo que nos pidieron en 2026. Vinieron 12 veces: 3 auditorías internas, 1 externa y 8 visitas de la SSF. Seis temas los pidieron 2 o más entidades: hay que tenerlos siempre listos, sobre todo las Actas del Comité de Riesgos (NRP-20), que se pidieron 4 veces. NRP-20 es la norma más revisada (5 veces, 3 entidades). Octubre fue el mes de mayor carga: coincidieron Interna, Externa y SSF.</a:t>
+              <a:t>Resumen de lo que nos pidieron en 2026. Vinieron 19 veces: 7 auditorías internas, 4 externas y 8 visitas de la SSF. Seis temas los pidieron 2 o más entidades: hay que tenerlos siempre listos, sobre todo las Actas del Comité de Riesgos (NRP-20), pedidas 4 veces, y Clasificación de cartera y el Plan de Continuidad, pedidos 3 veces cada uno. NRP-20 es la norma más revisada (5 veces, 3 entidades). En octubre coincidieron Interna, Externa y SSF.</a:t>
             </a:r>
           </a:p>
         </p:txBody>
@@ -4240,7 +4240,7 @@
                 </a:solidFill>
                 <a:latin typeface="Century Gothic"/>
               </a:rPr>
-              <a:t>3</a:t>
+              <a:t>7</a:t>
             </a:r>
           </a:p>
         </p:txBody>
@@ -4322,7 +4322,7 @@
                 </a:solidFill>
                 <a:latin typeface="Arial"/>
               </a:rPr>
-              <a:t>18</a:t>
+              <a:t>22</a:t>
             </a:r>
             <a:r>
               <a:rPr sz="1100" b="0">
@@ -4340,7 +4340,7 @@
                 </a:solidFill>
                 <a:latin typeface="Arial"/>
               </a:rPr>
-              <a:t>8</a:t>
+              <a:t>12</a:t>
             </a:r>
             <a:r>
               <a:rPr sz="1100" b="0">
@@ -4384,7 +4384,7 @@
                 </a:solidFill>
                 <a:latin typeface="Arial"/>
               </a:rPr>
-              <a:t>May · Ago · Oct</a:t>
+              <a:t>Mar · May (2) · Jun (2) · Ago · Oct</a:t>
             </a:r>
           </a:p>
         </p:txBody>
@@ -4568,7 +4568,7 @@
                 </a:solidFill>
                 <a:latin typeface="Century Gothic"/>
               </a:rPr>
-              <a:t>1</a:t>
+              <a:t>4</a:t>
             </a:r>
           </a:p>
         </p:txBody>
@@ -4603,7 +4603,7 @@
                 </a:solidFill>
                 <a:latin typeface="Arial"/>
               </a:rPr>
-              <a:t>visita en</a:t>
+              <a:t>visitas en</a:t>
             </a:r>
           </a:p>
           <a:p>
@@ -4650,7 +4650,7 @@
                 </a:solidFill>
                 <a:latin typeface="Arial"/>
               </a:rPr>
-              <a:t>10</a:t>
+              <a:t>13</a:t>
             </a:r>
             <a:r>
               <a:rPr sz="1100" b="0">
@@ -4712,7 +4712,7 @@
                 </a:solidFill>
                 <a:latin typeface="Arial"/>
               </a:rPr>
-              <a:t>Oct</a:t>
+              <a:t>Ene · Abr · Jul · Oct</a:t>
             </a:r>
           </a:p>
         </p:txBody>
@@ -5156,7 +5156,7 @@
                 </a:solidFill>
                 <a:latin typeface="Century Gothic"/>
               </a:rPr>
-              <a:t>12</a:t>
+              <a:t>19</a:t>
             </a:r>
           </a:p>
         </p:txBody>
@@ -5226,7 +5226,7 @@
                 </a:solidFill>
                 <a:latin typeface="Arial"/>
               </a:rPr>
-              <a:t>Octubre </a:t>
+              <a:t>Octubre: </a:t>
             </a:r>
             <a:r>
               <a:rPr sz="1100" b="0">
@@ -5235,7 +5235,7 @@
                 </a:solidFill>
                 <a:latin typeface="Arial"/>
               </a:rPr>
-              <a:t>fue el mes más cargado: vinieron las 3</a:t>
+              <a:t>coincidieron las 3 entidades en el mismo mes</a:t>
             </a:r>
           </a:p>
         </p:txBody>
@@ -5603,7 +5603,7 @@
                 </a:solidFill>
                 <a:latin typeface="Arial"/>
               </a:rPr>
-              <a:t>Pérdida Esperada</a:t>
+              <a:t>Clasificación de cartera, mora y reservas</a:t>
             </a:r>
           </a:p>
         </p:txBody>
@@ -5689,11 +5689,11 @@
             <a:r>
               <a:rPr sz="900" b="1">
                 <a:solidFill>
-                  <a:srgbClr val="5B6B7B"/>
+                  <a:srgbClr val="C62828"/>
                 </a:solidFill>
                 <a:latin typeface="Arial"/>
               </a:rPr>
-              <a:t>2 veces</a:t>
+              <a:t>3 veces</a:t>
             </a:r>
           </a:p>
         </p:txBody>
@@ -5776,7 +5776,7 @@
                 </a:solidFill>
                 <a:latin typeface="Arial"/>
               </a:rPr>
-              <a:t>Clasificación de cartera, mora y reservas</a:t>
+              <a:t>Plan de Continuidad (BCP/DRP)</a:t>
             </a:r>
           </a:p>
         </p:txBody>
@@ -5831,7 +5831,7 @@
                 </a:solidFill>
                 <a:latin typeface="Arial"/>
               </a:rPr>
-              <a:t>NCB-022</a:t>
+              <a:t>NRP-24</a:t>
             </a:r>
           </a:p>
         </p:txBody>
@@ -5862,11 +5862,11 @@
             <a:r>
               <a:rPr sz="900" b="1">
                 <a:solidFill>
-                  <a:srgbClr val="5B6B7B"/>
+                  <a:srgbClr val="C62828"/>
                 </a:solidFill>
                 <a:latin typeface="Arial"/>
               </a:rPr>
-              <a:t>2 veces</a:t>
+              <a:t>3 veces</a:t>
             </a:r>
           </a:p>
         </p:txBody>
@@ -5949,7 +5949,7 @@
                 </a:solidFill>
                 <a:latin typeface="Arial"/>
               </a:rPr>
-              <a:t>Remisiones a SSF / central de riesgos</a:t>
+              <a:t>Pérdida Esperada</a:t>
             </a:r>
           </a:p>
         </p:txBody>
@@ -6122,7 +6122,7 @@
                 </a:solidFill>
                 <a:latin typeface="Arial"/>
               </a:rPr>
-              <a:t>Gobierno Corporativo</a:t>
+              <a:t>Remisiones a SSF / central de riesgos</a:t>
             </a:r>
           </a:p>
         </p:txBody>
@@ -6177,7 +6177,7 @@
                 </a:solidFill>
                 <a:latin typeface="Arial"/>
               </a:rPr>
-              <a:t>NRP-17</a:t>
+              <a:t>NCB-022</a:t>
             </a:r>
           </a:p>
         </p:txBody>
@@ -6295,7 +6295,7 @@
                 </a:solidFill>
                 <a:latin typeface="Arial"/>
               </a:rPr>
-              <a:t>Plan de Continuidad (BCP/DRP)</a:t>
+              <a:t>Gobierno Corporativo</a:t>
             </a:r>
           </a:p>
         </p:txBody>
@@ -6350,7 +6350,7 @@
                 </a:solidFill>
                 <a:latin typeface="Arial"/>
               </a:rPr>
-              <a:t>NRP-24</a:t>
+              <a:t>NRP-17</a:t>
             </a:r>
           </a:p>
         </p:txBody>

--- a/presentacion-lunes/Resumen_Riesgos_2026_Opcion_B.pptx
+++ b/presentacion-lunes/Resumen_Riesgos_2026_Opcion_B.pptx
@@ -579,7 +579,7 @@
           <a:lstStyle/>
           <a:p>
             <a:r>
-              <a:t>Resumen de lo que nos pidieron en 2026. Vinieron 19 veces: 7 auditorías internas, 4 externas y 8 visitas de la SSF. Seis temas los pidieron 2 o más entidades: hay que tenerlos siempre listos, sobre todo las Actas del Comité de Riesgos (NRP-20), pedidas 4 veces, y Clasificación de cartera y el Plan de Continuidad, pedidos 3 veces cada uno. NRP-20 es la norma más revisada (5 veces, 3 entidades). En octubre coincidieron Interna, Externa y SSF.</a:t>
+              <a:t>Resumen de lo que nos pidieron en 2026. Vinieron 19 veces: 7 auditorías internas, 4 externas y 8 visitas de la SSF. Cuatro temas los pidieron 2 o más entidades: hay que tenerlos siempre listos, sobre todo las Actas del Comité de Riesgos (NRP-20), pedidas 4 veces; NCB-022 (cartera, Pérdida Esperada y remisiones a SSF) y el Plan de Continuidad, 3 veces cada uno. NRP-20 es la norma más revisada (5 veces, 3 entidades). En octubre coincidieron Interna, Externa y SSF.</a:t>
             </a:r>
           </a:p>
         </p:txBody>
@@ -5338,7 +5338,7 @@
                 </a:solidFill>
                 <a:latin typeface="Century Gothic"/>
               </a:rPr>
-              <a:t>6 temas los piden 2 o más entidades</a:t>
+              <a:t>4 temas los piden 2 o más entidades</a:t>
             </a:r>
             <a:r>
               <a:rPr sz="1300" b="0">
@@ -5361,7 +5361,7 @@
         <p:spPr>
           <a:xfrm>
             <a:off x="548640" y="4937760"/>
-            <a:ext cx="3630168" cy="621792"/>
+            <a:ext cx="5477256" cy="621792"/>
           </a:xfrm>
           <a:prstGeom prst="roundRect">
             <a:avLst>
@@ -5408,8 +5408,8 @@
         </p:nvSpPr>
         <p:spPr>
           <a:xfrm>
-            <a:off x="713232" y="5010912"/>
-            <a:ext cx="2624328" cy="475488"/>
+            <a:off x="713232" y="4992624"/>
+            <a:ext cx="4471416" cy="512064"/>
           </a:xfrm>
           <a:prstGeom prst="rect">
             <a:avLst/>
@@ -5424,7 +5424,7 @@
           <a:p>
             <a:pPr algn="l"/>
             <a:r>
-              <a:rPr sz="1100" b="1">
+              <a:rPr sz="1200" b="1">
                 <a:solidFill>
                   <a:srgbClr val="1F2A37"/>
                 </a:solidFill>
@@ -5443,7 +5443,7 @@
         </p:nvSpPr>
         <p:spPr>
           <a:xfrm>
-            <a:off x="3355848" y="5047488"/>
+            <a:off x="5202936" y="5047488"/>
             <a:ext cx="685800" cy="201168"/>
           </a:xfrm>
           <a:prstGeom prst="roundRect">
@@ -5498,7 +5498,7 @@
         </p:nvSpPr>
         <p:spPr>
           <a:xfrm>
-            <a:off x="3355848" y="5285232"/>
+            <a:off x="5202936" y="5285232"/>
             <a:ext cx="685800" cy="201168"/>
           </a:xfrm>
           <a:prstGeom prst="rect">
@@ -5533,8 +5533,8 @@
         </p:nvSpPr>
         <p:spPr>
           <a:xfrm>
-            <a:off x="4334256" y="4937760"/>
-            <a:ext cx="3630168" cy="621792"/>
+            <a:off x="6181344" y="4937760"/>
+            <a:ext cx="5477256" cy="621792"/>
           </a:xfrm>
           <a:prstGeom prst="roundRect">
             <a:avLst>
@@ -5581,8 +5581,8 @@
         </p:nvSpPr>
         <p:spPr>
           <a:xfrm>
-            <a:off x="4498848" y="5010912"/>
-            <a:ext cx="2624328" cy="475488"/>
+            <a:off x="6345936" y="4992624"/>
+            <a:ext cx="4471416" cy="512064"/>
           </a:xfrm>
           <a:prstGeom prst="rect">
             <a:avLst/>
@@ -5597,13 +5597,25 @@
           <a:p>
             <a:pPr algn="l"/>
             <a:r>
-              <a:rPr sz="1100" b="1">
+              <a:rPr sz="1200" b="1">
                 <a:solidFill>
                   <a:srgbClr val="1F2A37"/>
                 </a:solidFill>
                 <a:latin typeface="Arial"/>
               </a:rPr>
-              <a:t>Clasificación de cartera, mora y reservas</a:t>
+              <a:t>Riesgo de crédito</a:t>
+            </a:r>
+          </a:p>
+          <a:p>
+            <a:pPr algn="l"/>
+            <a:r>
+              <a:rPr sz="900" b="0">
+                <a:solidFill>
+                  <a:srgbClr val="5B6B7B"/>
+                </a:solidFill>
+                <a:latin typeface="Arial"/>
+              </a:rPr>
+              <a:t>Cartera, mora y reservas · Pérdida Esperada · Remisiones a SSF</a:t>
             </a:r>
           </a:p>
         </p:txBody>
@@ -5616,7 +5628,7 @@
         </p:nvSpPr>
         <p:spPr>
           <a:xfrm>
-            <a:off x="7141464" y="5047488"/>
+            <a:off x="10835640" y="5047488"/>
             <a:ext cx="685800" cy="201168"/>
           </a:xfrm>
           <a:prstGeom prst="roundRect">
@@ -5671,7 +5683,7 @@
         </p:nvSpPr>
         <p:spPr>
           <a:xfrm>
-            <a:off x="7141464" y="5285232"/>
+            <a:off x="10835640" y="5285232"/>
             <a:ext cx="685800" cy="201168"/>
           </a:xfrm>
           <a:prstGeom prst="rect">
@@ -5706,8 +5718,8 @@
         </p:nvSpPr>
         <p:spPr>
           <a:xfrm>
-            <a:off x="8119872" y="4937760"/>
-            <a:ext cx="3630168" cy="621792"/>
+            <a:off x="548640" y="5669280"/>
+            <a:ext cx="5477256" cy="621792"/>
           </a:xfrm>
           <a:prstGeom prst="roundRect">
             <a:avLst>
@@ -5754,8 +5766,8 @@
         </p:nvSpPr>
         <p:spPr>
           <a:xfrm>
-            <a:off x="8284464" y="5010912"/>
-            <a:ext cx="2624328" cy="475488"/>
+            <a:off x="713232" y="5724144"/>
+            <a:ext cx="4471416" cy="512064"/>
           </a:xfrm>
           <a:prstGeom prst="rect">
             <a:avLst/>
@@ -5770,7 +5782,7 @@
           <a:p>
             <a:pPr algn="l"/>
             <a:r>
-              <a:rPr sz="1100" b="1">
+              <a:rPr sz="1200" b="1">
                 <a:solidFill>
                   <a:srgbClr val="1F2A37"/>
                 </a:solidFill>
@@ -5789,7 +5801,7 @@
         </p:nvSpPr>
         <p:spPr>
           <a:xfrm>
-            <a:off x="10927080" y="5047488"/>
+            <a:off x="5202936" y="5779008"/>
             <a:ext cx="685800" cy="201168"/>
           </a:xfrm>
           <a:prstGeom prst="roundRect">
@@ -5844,7 +5856,7 @@
         </p:nvSpPr>
         <p:spPr>
           <a:xfrm>
-            <a:off x="10927080" y="5285232"/>
+            <a:off x="5202936" y="6016752"/>
             <a:ext cx="685800" cy="201168"/>
           </a:xfrm>
           <a:prstGeom prst="rect">
@@ -5879,8 +5891,8 @@
         </p:nvSpPr>
         <p:spPr>
           <a:xfrm>
-            <a:off x="548640" y="5669280"/>
-            <a:ext cx="3630168" cy="621792"/>
+            <a:off x="6181344" y="5669280"/>
+            <a:ext cx="5477256" cy="621792"/>
           </a:xfrm>
           <a:prstGeom prst="roundRect">
             <a:avLst>
@@ -5927,8 +5939,8 @@
         </p:nvSpPr>
         <p:spPr>
           <a:xfrm>
-            <a:off x="713232" y="5742432"/>
-            <a:ext cx="2624328" cy="475488"/>
+            <a:off x="6345936" y="5724144"/>
+            <a:ext cx="4471416" cy="512064"/>
           </a:xfrm>
           <a:prstGeom prst="rect">
             <a:avLst/>
@@ -5943,13 +5955,13 @@
           <a:p>
             <a:pPr algn="l"/>
             <a:r>
-              <a:rPr sz="1100" b="1">
+              <a:rPr sz="1200" b="1">
                 <a:solidFill>
                   <a:srgbClr val="1F2A37"/>
                 </a:solidFill>
                 <a:latin typeface="Arial"/>
               </a:rPr>
-              <a:t>Pérdida Esperada</a:t>
+              <a:t>Gobierno Corporativo</a:t>
             </a:r>
           </a:p>
         </p:txBody>
@@ -5962,7 +5974,7 @@
         </p:nvSpPr>
         <p:spPr>
           <a:xfrm>
-            <a:off x="3355848" y="5779008"/>
+            <a:off x="10835640" y="5779008"/>
             <a:ext cx="685800" cy="201168"/>
           </a:xfrm>
           <a:prstGeom prst="roundRect">
@@ -6004,7 +6016,7 @@
                 </a:solidFill>
                 <a:latin typeface="Arial"/>
               </a:rPr>
-              <a:t>NCB-022</a:t>
+              <a:t>NRP-17</a:t>
             </a:r>
           </a:p>
         </p:txBody>
@@ -6017,7 +6029,7 @@
         </p:nvSpPr>
         <p:spPr>
           <a:xfrm>
-            <a:off x="3355848" y="6016752"/>
+            <a:off x="10835640" y="6016752"/>
             <a:ext cx="685800" cy="201168"/>
           </a:xfrm>
           <a:prstGeom prst="rect">
@@ -6046,353 +6058,7 @@
       </p:sp>
       <p:sp>
         <p:nvSpPr>
-          <p:cNvPr id="57" name="Rounded Rectangle 56"/>
-          <p:cNvSpPr/>
-          <p:nvPr/>
-        </p:nvSpPr>
-        <p:spPr>
-          <a:xfrm>
-            <a:off x="4334256" y="5669280"/>
-            <a:ext cx="3630168" cy="621792"/>
-          </a:xfrm>
-          <a:prstGeom prst="roundRect">
-            <a:avLst>
-              <a:gd name="adj" fmla="val 12000"/>
-            </a:avLst>
-          </a:prstGeom>
-          <a:solidFill>
-            <a:srgbClr val="FFFFFF"/>
-          </a:solidFill>
-          <a:ln w="12700">
-            <a:solidFill>
-              <a:srgbClr val="D5DDE7"/>
-            </a:solidFill>
-          </a:ln>
-          <a:effectLst/>
-        </p:spPr>
-        <p:style>
-          <a:lnRef idx="1">
-            <a:schemeClr val="accent1"/>
-          </a:lnRef>
-          <a:fillRef idx="3">
-            <a:schemeClr val="accent1"/>
-          </a:fillRef>
-          <a:effectRef idx="2">
-            <a:schemeClr val="accent1"/>
-          </a:effectRef>
-          <a:fontRef idx="minor">
-            <a:schemeClr val="lt1"/>
-          </a:fontRef>
-        </p:style>
-        <p:txBody>
-          <a:bodyPr rtlCol="0" anchor="ctr"/>
-          <a:lstStyle/>
-          <a:p>
-            <a:pPr algn="ctr"/>
-          </a:p>
-        </p:txBody>
-      </p:sp>
-      <p:sp>
-        <p:nvSpPr>
-          <p:cNvPr id="58" name="TextBox 57"/>
-          <p:cNvSpPr txBox="1"/>
-          <p:nvPr/>
-        </p:nvSpPr>
-        <p:spPr>
-          <a:xfrm>
-            <a:off x="4498848" y="5742432"/>
-            <a:ext cx="2624328" cy="475488"/>
-          </a:xfrm>
-          <a:prstGeom prst="rect">
-            <a:avLst/>
-          </a:prstGeom>
-          <a:noFill/>
-        </p:spPr>
-        <p:txBody>
-          <a:bodyPr wrap="square" lIns="0" rIns="0" tIns="0" bIns="0" anchor="ctr">
-            <a:spAutoFit/>
-          </a:bodyPr>
-          <a:lstStyle/>
-          <a:p>
-            <a:pPr algn="l"/>
-            <a:r>
-              <a:rPr sz="1100" b="1">
-                <a:solidFill>
-                  <a:srgbClr val="1F2A37"/>
-                </a:solidFill>
-                <a:latin typeface="Arial"/>
-              </a:rPr>
-              <a:t>Remisiones a SSF / central de riesgos</a:t>
-            </a:r>
-          </a:p>
-        </p:txBody>
-      </p:sp>
-      <p:sp>
-        <p:nvSpPr>
-          <p:cNvPr id="59" name="Rounded Rectangle 58"/>
-          <p:cNvSpPr/>
-          <p:nvPr/>
-        </p:nvSpPr>
-        <p:spPr>
-          <a:xfrm>
-            <a:off x="7141464" y="5779008"/>
-            <a:ext cx="685800" cy="201168"/>
-          </a:xfrm>
-          <a:prstGeom prst="roundRect">
-            <a:avLst>
-              <a:gd name="adj" fmla="val 50000"/>
-            </a:avLst>
-          </a:prstGeom>
-          <a:solidFill>
-            <a:srgbClr val="003D6F"/>
-          </a:solidFill>
-          <a:ln>
-            <a:noFill/>
-          </a:ln>
-          <a:effectLst/>
-        </p:spPr>
-        <p:style>
-          <a:lnRef idx="1">
-            <a:schemeClr val="accent1"/>
-          </a:lnRef>
-          <a:fillRef idx="3">
-            <a:schemeClr val="accent1"/>
-          </a:fillRef>
-          <a:effectRef idx="2">
-            <a:schemeClr val="accent1"/>
-          </a:effectRef>
-          <a:fontRef idx="minor">
-            <a:schemeClr val="lt1"/>
-          </a:fontRef>
-        </p:style>
-        <p:txBody>
-          <a:bodyPr rtlCol="0" anchor="ctr" lIns="0" rIns="0" tIns="0" bIns="0"/>
-          <a:lstStyle/>
-          <a:p>
-            <a:pPr algn="ctr"/>
-            <a:r>
-              <a:rPr sz="800" b="1">
-                <a:solidFill>
-                  <a:srgbClr val="FFFFFF"/>
-                </a:solidFill>
-                <a:latin typeface="Arial"/>
-              </a:rPr>
-              <a:t>NCB-022</a:t>
-            </a:r>
-          </a:p>
-        </p:txBody>
-      </p:sp>
-      <p:sp>
-        <p:nvSpPr>
-          <p:cNvPr id="60" name="TextBox 59"/>
-          <p:cNvSpPr txBox="1"/>
-          <p:nvPr/>
-        </p:nvSpPr>
-        <p:spPr>
-          <a:xfrm>
-            <a:off x="7141464" y="6016752"/>
-            <a:ext cx="685800" cy="201168"/>
-          </a:xfrm>
-          <a:prstGeom prst="rect">
-            <a:avLst/>
-          </a:prstGeom>
-          <a:noFill/>
-        </p:spPr>
-        <p:txBody>
-          <a:bodyPr wrap="square" lIns="0" rIns="0" tIns="0" bIns="0" anchor="t">
-            <a:spAutoFit/>
-          </a:bodyPr>
-          <a:lstStyle/>
-          <a:p>
-            <a:pPr algn="ctr"/>
-            <a:r>
-              <a:rPr sz="900" b="1">
-                <a:solidFill>
-                  <a:srgbClr val="5B6B7B"/>
-                </a:solidFill>
-                <a:latin typeface="Arial"/>
-              </a:rPr>
-              <a:t>2 veces</a:t>
-            </a:r>
-          </a:p>
-        </p:txBody>
-      </p:sp>
-      <p:sp>
-        <p:nvSpPr>
-          <p:cNvPr id="61" name="Rounded Rectangle 60"/>
-          <p:cNvSpPr/>
-          <p:nvPr/>
-        </p:nvSpPr>
-        <p:spPr>
-          <a:xfrm>
-            <a:off x="8119872" y="5669280"/>
-            <a:ext cx="3630168" cy="621792"/>
-          </a:xfrm>
-          <a:prstGeom prst="roundRect">
-            <a:avLst>
-              <a:gd name="adj" fmla="val 12000"/>
-            </a:avLst>
-          </a:prstGeom>
-          <a:solidFill>
-            <a:srgbClr val="FFFFFF"/>
-          </a:solidFill>
-          <a:ln w="12700">
-            <a:solidFill>
-              <a:srgbClr val="D5DDE7"/>
-            </a:solidFill>
-          </a:ln>
-          <a:effectLst/>
-        </p:spPr>
-        <p:style>
-          <a:lnRef idx="1">
-            <a:schemeClr val="accent1"/>
-          </a:lnRef>
-          <a:fillRef idx="3">
-            <a:schemeClr val="accent1"/>
-          </a:fillRef>
-          <a:effectRef idx="2">
-            <a:schemeClr val="accent1"/>
-          </a:effectRef>
-          <a:fontRef idx="minor">
-            <a:schemeClr val="lt1"/>
-          </a:fontRef>
-        </p:style>
-        <p:txBody>
-          <a:bodyPr rtlCol="0" anchor="ctr"/>
-          <a:lstStyle/>
-          <a:p>
-            <a:pPr algn="ctr"/>
-          </a:p>
-        </p:txBody>
-      </p:sp>
-      <p:sp>
-        <p:nvSpPr>
-          <p:cNvPr id="62" name="TextBox 61"/>
-          <p:cNvSpPr txBox="1"/>
-          <p:nvPr/>
-        </p:nvSpPr>
-        <p:spPr>
-          <a:xfrm>
-            <a:off x="8284464" y="5742432"/>
-            <a:ext cx="2624328" cy="475488"/>
-          </a:xfrm>
-          <a:prstGeom prst="rect">
-            <a:avLst/>
-          </a:prstGeom>
-          <a:noFill/>
-        </p:spPr>
-        <p:txBody>
-          <a:bodyPr wrap="square" lIns="0" rIns="0" tIns="0" bIns="0" anchor="ctr">
-            <a:spAutoFit/>
-          </a:bodyPr>
-          <a:lstStyle/>
-          <a:p>
-            <a:pPr algn="l"/>
-            <a:r>
-              <a:rPr sz="1100" b="1">
-                <a:solidFill>
-                  <a:srgbClr val="1F2A37"/>
-                </a:solidFill>
-                <a:latin typeface="Arial"/>
-              </a:rPr>
-              <a:t>Gobierno Corporativo</a:t>
-            </a:r>
-          </a:p>
-        </p:txBody>
-      </p:sp>
-      <p:sp>
-        <p:nvSpPr>
-          <p:cNvPr id="63" name="Rounded Rectangle 62"/>
-          <p:cNvSpPr/>
-          <p:nvPr/>
-        </p:nvSpPr>
-        <p:spPr>
-          <a:xfrm>
-            <a:off x="10927080" y="5779008"/>
-            <a:ext cx="685800" cy="201168"/>
-          </a:xfrm>
-          <a:prstGeom prst="roundRect">
-            <a:avLst>
-              <a:gd name="adj" fmla="val 50000"/>
-            </a:avLst>
-          </a:prstGeom>
-          <a:solidFill>
-            <a:srgbClr val="003D6F"/>
-          </a:solidFill>
-          <a:ln>
-            <a:noFill/>
-          </a:ln>
-          <a:effectLst/>
-        </p:spPr>
-        <p:style>
-          <a:lnRef idx="1">
-            <a:schemeClr val="accent1"/>
-          </a:lnRef>
-          <a:fillRef idx="3">
-            <a:schemeClr val="accent1"/>
-          </a:fillRef>
-          <a:effectRef idx="2">
-            <a:schemeClr val="accent1"/>
-          </a:effectRef>
-          <a:fontRef idx="minor">
-            <a:schemeClr val="lt1"/>
-          </a:fontRef>
-        </p:style>
-        <p:txBody>
-          <a:bodyPr rtlCol="0" anchor="ctr" lIns="0" rIns="0" tIns="0" bIns="0"/>
-          <a:lstStyle/>
-          <a:p>
-            <a:pPr algn="ctr"/>
-            <a:r>
-              <a:rPr sz="800" b="1">
-                <a:solidFill>
-                  <a:srgbClr val="FFFFFF"/>
-                </a:solidFill>
-                <a:latin typeface="Arial"/>
-              </a:rPr>
-              <a:t>NRP-17</a:t>
-            </a:r>
-          </a:p>
-        </p:txBody>
-      </p:sp>
-      <p:sp>
-        <p:nvSpPr>
-          <p:cNvPr id="64" name="TextBox 63"/>
-          <p:cNvSpPr txBox="1"/>
-          <p:nvPr/>
-        </p:nvSpPr>
-        <p:spPr>
-          <a:xfrm>
-            <a:off x="10927080" y="6016752"/>
-            <a:ext cx="685800" cy="201168"/>
-          </a:xfrm>
-          <a:prstGeom prst="rect">
-            <a:avLst/>
-          </a:prstGeom>
-          <a:noFill/>
-        </p:spPr>
-        <p:txBody>
-          <a:bodyPr wrap="square" lIns="0" rIns="0" tIns="0" bIns="0" anchor="t">
-            <a:spAutoFit/>
-          </a:bodyPr>
-          <a:lstStyle/>
-          <a:p>
-            <a:pPr algn="ctr"/>
-            <a:r>
-              <a:rPr sz="900" b="1">
-                <a:solidFill>
-                  <a:srgbClr val="5B6B7B"/>
-                </a:solidFill>
-                <a:latin typeface="Arial"/>
-              </a:rPr>
-              <a:t>2 veces</a:t>
-            </a:r>
-          </a:p>
-        </p:txBody>
-      </p:sp>
-      <p:sp>
-        <p:nvSpPr>
-          <p:cNvPr id="65" name="Fuente"/>
+          <p:cNvPr id="57" name="Fuente"/>
           <p:cNvSpPr txBox="1"/>
           <p:nvPr/>
         </p:nvSpPr>

--- a/presentacion-lunes/Resumen_Riesgos_2026_Opcion_B.pptx
+++ b/presentacion-lunes/Resumen_Riesgos_2026_Opcion_B.pptx
@@ -579,7 +579,7 @@
           <a:lstStyle/>
           <a:p>
             <a:r>
-              <a:t>Resumen de lo que nos pidieron en 2026. Vinieron 19 veces: 7 auditorías internas, 4 externas y 8 visitas de la SSF. Cuatro temas los pidieron 2 o más entidades: hay que tenerlos siempre listos, sobre todo las Actas del Comité de Riesgos (NRP-20), pedidas 4 veces; NCB-022 (cartera, Pérdida Esperada y remisiones a SSF) y el Plan de Continuidad, 3 veces cada uno. NRP-20 es la norma más revisada (5 veces, 3 entidades). En octubre coincidieron Interna, Externa y SSF.</a:t>
+              <a:t>Resumen de lo que nos pidieron en 2026. Vinieron 19 veces: 7 auditorías internas, 4 externas y 8 visitas de la SSF, y en total pidieron 26 temas distintos. Cuatro temas los pidieron 2 o más entidades: hay que tenerlos siempre listos. Las Actas del Comité de Riesgos (NRP-20) se pidieron 4 veces; los temas de NCB-022 (cartera y reservas, Pérdida Esperada, remisiones a SSF y matriz de migración) y el Plan de Continuidad, 3 veces cada uno; Gobierno Corporativo, 2 veces. NRP-20 es la norma más revisada: 5 veces, por 3 entidades. En octubre coincidieron Interna, Externa y SSF.</a:t>
             </a:r>
           </a:p>
         </p:txBody>
@@ -4322,7 +4322,7 @@
                 </a:solidFill>
                 <a:latin typeface="Arial"/>
               </a:rPr>
-              <a:t>22</a:t>
+              <a:t>15</a:t>
             </a:r>
             <a:r>
               <a:rPr sz="1100" b="0">
@@ -4340,7 +4340,7 @@
                 </a:solidFill>
                 <a:latin typeface="Arial"/>
               </a:rPr>
-              <a:t>12</a:t>
+              <a:t>8</a:t>
             </a:r>
             <a:r>
               <a:rPr sz="1100" b="0">
@@ -4650,7 +4650,7 @@
                 </a:solidFill>
                 <a:latin typeface="Arial"/>
               </a:rPr>
-              <a:t>13</a:t>
+              <a:t>11</a:t>
             </a:r>
             <a:r>
               <a:rPr sz="1100" b="0">
@@ -4978,7 +4978,7 @@
                 </a:solidFill>
                 <a:latin typeface="Arial"/>
               </a:rPr>
-              <a:t>8</a:t>
+              <a:t>6</a:t>
             </a:r>
             <a:r>
               <a:rPr sz="1100" b="0">
@@ -4996,7 +4996,7 @@
                 </a:solidFill>
                 <a:latin typeface="Arial"/>
               </a:rPr>
-              <a:t>10</a:t>
+              <a:t>7</a:t>
             </a:r>
             <a:r>
               <a:rPr sz="1100" b="0">
@@ -5054,7 +5054,7 @@
         <p:spPr>
           <a:xfrm>
             <a:off x="9326880" y="2011680"/>
-            <a:ext cx="2331720" cy="2240280"/>
+            <a:ext cx="2331720" cy="1234440"/>
           </a:xfrm>
           <a:prstGeom prst="roundRect">
             <a:avLst>
@@ -5099,8 +5099,8 @@
         </p:nvSpPr>
         <p:spPr>
           <a:xfrm>
-            <a:off x="9555480" y="2240280"/>
-            <a:ext cx="1874519" cy="274320"/>
+            <a:off x="9555480" y="2148840"/>
+            <a:ext cx="1874519" cy="228600"/>
           </a:xfrm>
           <a:prstGeom prst="rect">
             <a:avLst/>
@@ -5134,8 +5134,8 @@
         </p:nvSpPr>
         <p:spPr>
           <a:xfrm>
-            <a:off x="9555480" y="2423160"/>
-            <a:ext cx="1874519" cy="777240"/>
+            <a:off x="9555480" y="2313432"/>
+            <a:ext cx="1874519" cy="502920"/>
           </a:xfrm>
           <a:prstGeom prst="rect">
             <a:avLst/>
@@ -5143,14 +5143,14 @@
           <a:noFill/>
         </p:spPr>
         <p:txBody>
-          <a:bodyPr wrap="square" lIns="0" rIns="0" tIns="0" bIns="0" anchor="t">
+          <a:bodyPr wrap="square" lIns="0" rIns="0" tIns="0" bIns="0" anchor="ctr">
             <a:spAutoFit/>
           </a:bodyPr>
           <a:lstStyle/>
           <a:p>
             <a:pPr algn="l"/>
             <a:r>
-              <a:rPr sz="5400" b="1">
+              <a:rPr sz="3800" b="1">
                 <a:solidFill>
                   <a:srgbClr val="FFFFFF"/>
                 </a:solidFill>
@@ -5169,8 +5169,8 @@
         </p:nvSpPr>
         <p:spPr>
           <a:xfrm>
-            <a:off x="9555480" y="3182112"/>
-            <a:ext cx="1874519" cy="457200"/>
+            <a:off x="9555480" y="2862072"/>
+            <a:ext cx="1874519" cy="201168"/>
           </a:xfrm>
           <a:prstGeom prst="rect">
             <a:avLst/>
@@ -5185,13 +5185,13 @@
           <a:p>
             <a:pPr algn="l"/>
             <a:r>
-              <a:rPr sz="1200" b="0">
+              <a:rPr sz="1200" b="1">
                 <a:solidFill>
                   <a:srgbClr val="FFFFFF"/>
                 </a:solidFill>
                 <a:latin typeface="Arial"/>
               </a:rPr>
-              <a:t>visitas y auditorías distintas</a:t>
+              <a:t>visitas y auditorías</a:t>
             </a:r>
           </a:p>
         </p:txBody>
@@ -5204,8 +5204,8 @@
         </p:nvSpPr>
         <p:spPr>
           <a:xfrm>
-            <a:off x="9555480" y="3639312"/>
-            <a:ext cx="1874519" cy="502920"/>
+            <a:off x="9555480" y="3044952"/>
+            <a:ext cx="1874519" cy="182880"/>
           </a:xfrm>
           <a:prstGeom prst="rect">
             <a:avLst/>
@@ -5220,42 +5220,35 @@
           <a:p>
             <a:pPr algn="l"/>
             <a:r>
-              <a:rPr sz="1100" b="1">
+              <a:rPr sz="1000" b="0">
                 <a:solidFill>
-                  <a:srgbClr val="FFD27A"/>
+                  <a:srgbClr val="9CC3E8"/>
                 </a:solidFill>
                 <a:latin typeface="Arial"/>
               </a:rPr>
-              <a:t>Octubre: </a:t>
-            </a:r>
-            <a:r>
-              <a:rPr sz="1100" b="0">
-                <a:solidFill>
-                  <a:srgbClr val="FFFFFF"/>
-                </a:solidFill>
-                <a:latin typeface="Arial"/>
-              </a:rPr>
-              <a:t>coincidieron las 3 entidades en el mismo mes</a:t>
-            </a:r>
-          </a:p>
-        </p:txBody>
-      </p:sp>
-      <p:sp>
-        <p:nvSpPr>
-          <p:cNvPr id="38" name="Oval 37"/>
+              <a:t>26 temas distintos pedidos</a:t>
+            </a:r>
+          </a:p>
+        </p:txBody>
+      </p:sp>
+      <p:sp>
+        <p:nvSpPr>
+          <p:cNvPr id="38" name="Norma más auditada"/>
           <p:cNvSpPr/>
           <p:nvPr/>
         </p:nvSpPr>
         <p:spPr>
           <a:xfrm>
-            <a:off x="548640" y="4462272"/>
-            <a:ext cx="347472" cy="347472"/>
-          </a:xfrm>
-          <a:prstGeom prst="ellipse">
-            <a:avLst/>
+            <a:off x="9326880" y="3383280"/>
+            <a:ext cx="2331720" cy="868680"/>
+          </a:xfrm>
+          <a:prstGeom prst="roundRect">
+            <a:avLst>
+              <a:gd name="adj" fmla="val 8000"/>
+            </a:avLst>
           </a:prstGeom>
           <a:solidFill>
-            <a:srgbClr val="C62828"/>
+            <a:srgbClr val="EEF3F9"/>
           </a:solidFill>
           <a:ln>
             <a:noFill/>
@@ -5284,9 +5277,158 @@
           </a:p>
         </p:txBody>
       </p:sp>
+      <p:sp>
+        <p:nvSpPr>
+          <p:cNvPr id="39" name="TextBox 38"/>
+          <p:cNvSpPr txBox="1"/>
+          <p:nvPr/>
+        </p:nvSpPr>
+        <p:spPr>
+          <a:xfrm>
+            <a:off x="9555480" y="3493008"/>
+            <a:ext cx="1874519" cy="201168"/>
+          </a:xfrm>
+          <a:prstGeom prst="rect">
+            <a:avLst/>
+          </a:prstGeom>
+          <a:noFill/>
+        </p:spPr>
+        <p:txBody>
+          <a:bodyPr wrap="square" lIns="0" rIns="0" tIns="0" bIns="0" anchor="t">
+            <a:spAutoFit/>
+          </a:bodyPr>
+          <a:lstStyle/>
+          <a:p>
+            <a:pPr algn="l"/>
+            <a:r>
+              <a:rPr sz="1000" b="1">
+                <a:solidFill>
+                  <a:srgbClr val="5B6B7B"/>
+                </a:solidFill>
+                <a:latin typeface="Arial"/>
+              </a:rPr>
+              <a:t>NORMA MÁS AUDITADA</a:t>
+            </a:r>
+          </a:p>
+        </p:txBody>
+      </p:sp>
+      <p:sp>
+        <p:nvSpPr>
+          <p:cNvPr id="40" name="TextBox 39"/>
+          <p:cNvSpPr txBox="1"/>
+          <p:nvPr/>
+        </p:nvSpPr>
+        <p:spPr>
+          <a:xfrm>
+            <a:off x="9555480" y="3675888"/>
+            <a:ext cx="1874519" cy="365760"/>
+          </a:xfrm>
+          <a:prstGeom prst="rect">
+            <a:avLst/>
+          </a:prstGeom>
+          <a:noFill/>
+        </p:spPr>
+        <p:txBody>
+          <a:bodyPr wrap="square" lIns="0" rIns="0" tIns="0" bIns="0" anchor="ctr">
+            <a:spAutoFit/>
+          </a:bodyPr>
+          <a:lstStyle/>
+          <a:p>
+            <a:pPr algn="l"/>
+            <a:r>
+              <a:rPr sz="2400" b="1">
+                <a:solidFill>
+                  <a:srgbClr val="003D6F"/>
+                </a:solidFill>
+                <a:latin typeface="Century Gothic"/>
+              </a:rPr>
+              <a:t>NRP-20</a:t>
+            </a:r>
+          </a:p>
+        </p:txBody>
+      </p:sp>
+      <p:sp>
+        <p:nvSpPr>
+          <p:cNvPr id="41" name="TextBox 40"/>
+          <p:cNvSpPr txBox="1"/>
+          <p:nvPr/>
+        </p:nvSpPr>
+        <p:spPr>
+          <a:xfrm>
+            <a:off x="9555480" y="4041648"/>
+            <a:ext cx="1874519" cy="182880"/>
+          </a:xfrm>
+          <a:prstGeom prst="rect">
+            <a:avLst/>
+          </a:prstGeom>
+          <a:noFill/>
+        </p:spPr>
+        <p:txBody>
+          <a:bodyPr wrap="square" lIns="0" rIns="0" tIns="0" bIns="0" anchor="t">
+            <a:spAutoFit/>
+          </a:bodyPr>
+          <a:lstStyle/>
+          <a:p>
+            <a:pPr algn="l"/>
+            <a:r>
+              <a:rPr sz="1000" b="0">
+                <a:solidFill>
+                  <a:srgbClr val="5B6B7B"/>
+                </a:solidFill>
+                <a:latin typeface="Arial"/>
+              </a:rPr>
+              <a:t>5 veces · 3 entidades</a:t>
+            </a:r>
+          </a:p>
+        </p:txBody>
+      </p:sp>
+      <p:sp>
+        <p:nvSpPr>
+          <p:cNvPr id="42" name="Oval 41"/>
+          <p:cNvSpPr/>
+          <p:nvPr/>
+        </p:nvSpPr>
+        <p:spPr>
+          <a:xfrm>
+            <a:off x="548640" y="4462272"/>
+            <a:ext cx="347472" cy="347472"/>
+          </a:xfrm>
+          <a:prstGeom prst="ellipse">
+            <a:avLst/>
+          </a:prstGeom>
+          <a:solidFill>
+            <a:srgbClr val="C62828"/>
+          </a:solidFill>
+          <a:ln>
+            <a:noFill/>
+          </a:ln>
+          <a:effectLst/>
+        </p:spPr>
+        <p:style>
+          <a:lnRef idx="1">
+            <a:schemeClr val="accent1"/>
+          </a:lnRef>
+          <a:fillRef idx="3">
+            <a:schemeClr val="accent1"/>
+          </a:fillRef>
+          <a:effectRef idx="2">
+            <a:schemeClr val="accent1"/>
+          </a:effectRef>
+          <a:fontRef idx="minor">
+            <a:schemeClr val="lt1"/>
+          </a:fontRef>
+        </p:style>
+        <p:txBody>
+          <a:bodyPr rtlCol="0" anchor="ctr"/>
+          <a:lstStyle/>
+          <a:p>
+            <a:pPr algn="ctr"/>
+          </a:p>
+        </p:txBody>
+      </p:sp>
       <p:pic>
         <p:nvPicPr>
-          <p:cNvPr id="39" name="Picture 38" descr="FaSyncAlt_white.png"/>
+          <p:cNvPr id="43" name="Picture 42" descr="FaSyncAlt_white.png"/>
           <p:cNvPicPr>
             <a:picLocks noChangeAspect="1"/>
           </p:cNvPicPr>
@@ -5310,7 +5452,7 @@
       </p:pic>
       <p:sp>
         <p:nvSpPr>
-          <p:cNvPr id="40" name="TextBox 39"/>
+          <p:cNvPr id="44" name="TextBox 43"/>
           <p:cNvSpPr txBox="1"/>
           <p:nvPr/>
         </p:nvSpPr>
@@ -5354,7 +5496,42 @@
       </p:sp>
       <p:sp>
         <p:nvSpPr>
-          <p:cNvPr id="41" name="Rounded Rectangle 40"/>
+          <p:cNvPr id="45" name="TextBox 44"/>
+          <p:cNvSpPr txBox="1"/>
+          <p:nvPr/>
+        </p:nvSpPr>
+        <p:spPr>
+          <a:xfrm>
+            <a:off x="7543800" y="4462272"/>
+            <a:ext cx="4114800" cy="347472"/>
+          </a:xfrm>
+          <a:prstGeom prst="rect">
+            <a:avLst/>
+          </a:prstGeom>
+          <a:noFill/>
+        </p:spPr>
+        <p:txBody>
+          <a:bodyPr wrap="square" lIns="0" rIns="0" tIns="0" bIns="0" anchor="ctr">
+            <a:spAutoFit/>
+          </a:bodyPr>
+          <a:lstStyle/>
+          <a:p>
+            <a:pPr algn="r"/>
+            <a:r>
+              <a:rPr sz="1100" b="1">
+                <a:solidFill>
+                  <a:srgbClr val="C62828"/>
+                </a:solidFill>
+                <a:latin typeface="Arial"/>
+              </a:rPr>
+              <a:t>Octubre: coincidieron las 3 entidades</a:t>
+            </a:r>
+          </a:p>
+        </p:txBody>
+      </p:sp>
+      <p:sp>
+        <p:nvSpPr>
+          <p:cNvPr id="46" name="Rounded Rectangle 45"/>
           <p:cNvSpPr/>
           <p:nvPr/>
         </p:nvSpPr>
@@ -5402,7 +5579,7 @@
       </p:sp>
       <p:sp>
         <p:nvSpPr>
-          <p:cNvPr id="42" name="TextBox 41"/>
+          <p:cNvPr id="47" name="TextBox 46"/>
           <p:cNvSpPr txBox="1"/>
           <p:nvPr/>
         </p:nvSpPr>
@@ -5437,7 +5614,7 @@
       </p:sp>
       <p:sp>
         <p:nvSpPr>
-          <p:cNvPr id="43" name="Rounded Rectangle 42"/>
+          <p:cNvPr id="48" name="Rounded Rectangle 47"/>
           <p:cNvSpPr/>
           <p:nvPr/>
         </p:nvSpPr>
@@ -5492,7 +5669,7 @@
       </p:sp>
       <p:sp>
         <p:nvSpPr>
-          <p:cNvPr id="44" name="TextBox 43"/>
+          <p:cNvPr id="49" name="TextBox 48"/>
           <p:cNvSpPr txBox="1"/>
           <p:nvPr/>
         </p:nvSpPr>
@@ -5527,7 +5704,7 @@
       </p:sp>
       <p:sp>
         <p:nvSpPr>
-          <p:cNvPr id="45" name="Rounded Rectangle 44"/>
+          <p:cNvPr id="50" name="Rounded Rectangle 49"/>
           <p:cNvSpPr/>
           <p:nvPr/>
         </p:nvSpPr>
@@ -5575,7 +5752,7 @@
       </p:sp>
       <p:sp>
         <p:nvSpPr>
-          <p:cNvPr id="46" name="TextBox 45"/>
+          <p:cNvPr id="51" name="TextBox 50"/>
           <p:cNvSpPr txBox="1"/>
           <p:nvPr/>
         </p:nvSpPr>
@@ -5615,14 +5792,14 @@
                 </a:solidFill>
                 <a:latin typeface="Arial"/>
               </a:rPr>
-              <a:t>Cartera, mora y reservas · Pérdida Esperada · Remisiones a SSF</a:t>
-            </a:r>
-          </a:p>
-        </p:txBody>
-      </p:sp>
-      <p:sp>
-        <p:nvSpPr>
-          <p:cNvPr id="47" name="Rounded Rectangle 46"/>
+              <a:t>Cartera y reservas · Pérdida Esperada · Remisiones a SSF · Matriz de migración</a:t>
+            </a:r>
+          </a:p>
+        </p:txBody>
+      </p:sp>
+      <p:sp>
+        <p:nvSpPr>
+          <p:cNvPr id="52" name="Rounded Rectangle 51"/>
           <p:cNvSpPr/>
           <p:nvPr/>
         </p:nvSpPr>
@@ -5677,7 +5854,7 @@
       </p:sp>
       <p:sp>
         <p:nvSpPr>
-          <p:cNvPr id="48" name="TextBox 47"/>
+          <p:cNvPr id="53" name="TextBox 52"/>
           <p:cNvSpPr txBox="1"/>
           <p:nvPr/>
         </p:nvSpPr>
@@ -5712,7 +5889,7 @@
       </p:sp>
       <p:sp>
         <p:nvSpPr>
-          <p:cNvPr id="49" name="Rounded Rectangle 48"/>
+          <p:cNvPr id="54" name="Rounded Rectangle 53"/>
           <p:cNvSpPr/>
           <p:nvPr/>
         </p:nvSpPr>
@@ -5760,7 +5937,7 @@
       </p:sp>
       <p:sp>
         <p:nvSpPr>
-          <p:cNvPr id="50" name="TextBox 49"/>
+          <p:cNvPr id="55" name="TextBox 54"/>
           <p:cNvSpPr txBox="1"/>
           <p:nvPr/>
         </p:nvSpPr>
@@ -5795,7 +5972,7 @@
       </p:sp>
       <p:sp>
         <p:nvSpPr>
-          <p:cNvPr id="51" name="Rounded Rectangle 50"/>
+          <p:cNvPr id="56" name="Rounded Rectangle 55"/>
           <p:cNvSpPr/>
           <p:nvPr/>
         </p:nvSpPr>
@@ -5850,7 +6027,7 @@
       </p:sp>
       <p:sp>
         <p:nvSpPr>
-          <p:cNvPr id="52" name="TextBox 51"/>
+          <p:cNvPr id="57" name="TextBox 56"/>
           <p:cNvSpPr txBox="1"/>
           <p:nvPr/>
         </p:nvSpPr>
@@ -5885,7 +6062,7 @@
       </p:sp>
       <p:sp>
         <p:nvSpPr>
-          <p:cNvPr id="53" name="Rounded Rectangle 52"/>
+          <p:cNvPr id="58" name="Rounded Rectangle 57"/>
           <p:cNvSpPr/>
           <p:nvPr/>
         </p:nvSpPr>
@@ -5933,7 +6110,7 @@
       </p:sp>
       <p:sp>
         <p:nvSpPr>
-          <p:cNvPr id="54" name="TextBox 53"/>
+          <p:cNvPr id="59" name="TextBox 58"/>
           <p:cNvSpPr txBox="1"/>
           <p:nvPr/>
         </p:nvSpPr>
@@ -5968,7 +6145,7 @@
       </p:sp>
       <p:sp>
         <p:nvSpPr>
-          <p:cNvPr id="55" name="Rounded Rectangle 54"/>
+          <p:cNvPr id="60" name="Rounded Rectangle 59"/>
           <p:cNvSpPr/>
           <p:nvPr/>
         </p:nvSpPr>
@@ -6023,7 +6200,7 @@
       </p:sp>
       <p:sp>
         <p:nvSpPr>
-          <p:cNvPr id="56" name="TextBox 55"/>
+          <p:cNvPr id="61" name="TextBox 60"/>
           <p:cNvSpPr txBox="1"/>
           <p:nvPr/>
         </p:nvSpPr>
@@ -6058,7 +6235,7 @@
       </p:sp>
       <p:sp>
         <p:nvSpPr>
-          <p:cNvPr id="57" name="Fuente"/>
+          <p:cNvPr id="62" name="Fuente"/>
           <p:cNvSpPr txBox="1"/>
           <p:nvPr/>
         </p:nvSpPr>
@@ -6086,7 +6263,7 @@
                 </a:solidFill>
                 <a:latin typeface="Arial"/>
               </a:rPr>
-              <a:t>Fuente: Matriz de Requerimientos de Riesgos 2026, hoja «Resumen Riesgos» · corte octubre 2026</a:t>
+              <a:t>Fuente: Matriz de Requerimientos de Riesgos 2026, hojas «Resumen Riesgos» y «Consolidado» · corte octubre 2026</a:t>
             </a:r>
           </a:p>
         </p:txBody>

--- a/presentacion-lunes/Resumen_Riesgos_2026_Opcion_B.pptx
+++ b/presentacion-lunes/Resumen_Riesgos_2026_Opcion_B.pptx
@@ -579,7 +579,7 @@
           <a:lstStyle/>
           <a:p>
             <a:r>
-              <a:t>Resumen de lo que nos pidieron en 2026. Vinieron 19 veces: 7 auditorías internas, 4 externas y 8 visitas de la SSF, y en total pidieron 26 temas distintos. Cuatro temas los pidieron 2 o más entidades: hay que tenerlos siempre listos. Las Actas del Comité de Riesgos (NRP-20) se pidieron 4 veces; los temas de NCB-022 (cartera y reservas, Pérdida Esperada, remisiones a SSF y matriz de migración) y el Plan de Continuidad, 3 veces cada uno; Gobierno Corporativo, 2 veces. NRP-20 es la norma más revisada: 5 veces, por 3 entidades. En octubre coincidieron Interna, Externa y SSF.</a:t>
+              <a:t>Resumen de lo que nos pidieron en 2026. Vinieron 19 veces: 7 auditorías internas, 4 externas y 8 visitas de la SSF, y pidieron 26 temas distintos. Contamos por norma: cada visita cuenta una vez por norma. Cinco normas las revisaron 2 o más entidades y hay que tenerlas siempre listas: NRP-20, 5 veces (Interna 2, Externa 1, SSF 2); NCB-022, 3 veces; NRP-24, 3 veces; NPB4-49, 2 veces; NRP-17, 2 veces. NRP-20 es la norma más revisada. En octubre coincidieron Interna, Externa y SSF.</a:t>
             </a:r>
           </a:p>
         </p:txBody>
@@ -5480,7 +5480,7 @@
                 </a:solidFill>
                 <a:latin typeface="Century Gothic"/>
               </a:rPr>
-              <a:t>4 temas los piden 2 o más entidades</a:t>
+              <a:t>5 normas las revisan 2 o más entidades</a:t>
             </a:r>
             <a:r>
               <a:rPr sz="1300" b="0">
@@ -5489,7 +5489,7 @@
                 </a:solidFill>
                 <a:latin typeface="Arial"/>
               </a:rPr>
-              <a:t>   →  tenerlos siempre listos</a:t>
+              <a:t>   →  tenerlas siempre listas</a:t>
             </a:r>
           </a:p>
         </p:txBody>
@@ -5538,11 +5538,11 @@
         <p:spPr>
           <a:xfrm>
             <a:off x="548640" y="4937760"/>
-            <a:ext cx="5477256" cy="621792"/>
+            <a:ext cx="2112264" cy="1371600"/>
           </a:xfrm>
           <a:prstGeom prst="roundRect">
             <a:avLst>
-              <a:gd name="adj" fmla="val 12000"/>
+              <a:gd name="adj" fmla="val 8000"/>
             </a:avLst>
           </a:prstGeom>
           <a:solidFill>
@@ -5585,8 +5585,8 @@
         </p:nvSpPr>
         <p:spPr>
           <a:xfrm>
-            <a:off x="713232" y="4992624"/>
-            <a:ext cx="4471416" cy="512064"/>
+            <a:off x="713232" y="5047488"/>
+            <a:ext cx="1783080" cy="292608"/>
           </a:xfrm>
           <a:prstGeom prst="rect">
             <a:avLst/>
@@ -5594,45 +5594,117 @@
           <a:noFill/>
         </p:spPr>
         <p:txBody>
-          <a:bodyPr wrap="square" lIns="0" rIns="0" tIns="0" bIns="0" anchor="ctr">
+          <a:bodyPr wrap="square" lIns="0" rIns="0" tIns="0" bIns="0" anchor="t">
             <a:spAutoFit/>
           </a:bodyPr>
           <a:lstStyle/>
           <a:p>
             <a:pPr algn="l"/>
             <a:r>
-              <a:rPr sz="1200" b="1">
+              <a:rPr sz="1600" b="1">
                 <a:solidFill>
-                  <a:srgbClr val="1F2A37"/>
+                  <a:srgbClr val="003D6F"/>
+                </a:solidFill>
+                <a:latin typeface="Century Gothic"/>
+              </a:rPr>
+              <a:t>NRP-20</a:t>
+            </a:r>
+          </a:p>
+        </p:txBody>
+      </p:sp>
+      <p:sp>
+        <p:nvSpPr>
+          <p:cNvPr id="48" name="TextBox 47"/>
+          <p:cNvSpPr txBox="1"/>
+          <p:nvPr/>
+        </p:nvSpPr>
+        <p:spPr>
+          <a:xfrm>
+            <a:off x="713232" y="5358384"/>
+            <a:ext cx="1783080" cy="201168"/>
+          </a:xfrm>
+          <a:prstGeom prst="rect">
+            <a:avLst/>
+          </a:prstGeom>
+          <a:noFill/>
+        </p:spPr>
+        <p:txBody>
+          <a:bodyPr wrap="square" lIns="0" rIns="0" tIns="0" bIns="0" anchor="t">
+            <a:spAutoFit/>
+          </a:bodyPr>
+          <a:lstStyle/>
+          <a:p>
+            <a:pPr algn="l"/>
+            <a:r>
+              <a:rPr sz="1000" b="1">
+                <a:solidFill>
+                  <a:srgbClr val="C62828"/>
                 </a:solidFill>
                 <a:latin typeface="Arial"/>
               </a:rPr>
-              <a:t>Actas Comité de Riesgos</a:t>
-            </a:r>
-          </a:p>
-        </p:txBody>
-      </p:sp>
-      <p:sp>
-        <p:nvSpPr>
-          <p:cNvPr id="48" name="Rounded Rectangle 47"/>
+              <a:t>5 veces · 3 entidades</a:t>
+            </a:r>
+          </a:p>
+        </p:txBody>
+      </p:sp>
+      <p:sp>
+        <p:nvSpPr>
+          <p:cNvPr id="49" name="TextBox 48"/>
+          <p:cNvSpPr txBox="1"/>
+          <p:nvPr/>
+        </p:nvSpPr>
+        <p:spPr>
+          <a:xfrm>
+            <a:off x="713232" y="5614416"/>
+            <a:ext cx="1783080" cy="640080"/>
+          </a:xfrm>
+          <a:prstGeom prst="rect">
+            <a:avLst/>
+          </a:prstGeom>
+          <a:noFill/>
+        </p:spPr>
+        <p:txBody>
+          <a:bodyPr wrap="square" lIns="0" rIns="0" tIns="0" bIns="0" anchor="t">
+            <a:spAutoFit/>
+          </a:bodyPr>
+          <a:lstStyle/>
+          <a:p>
+            <a:pPr algn="l"/>
+            <a:r>
+              <a:rPr sz="900" b="0">
+                <a:solidFill>
+                  <a:srgbClr val="5B6B7B"/>
+                </a:solidFill>
+                <a:latin typeface="Arial"/>
+              </a:rPr>
+              <a:t>Actas · Informes GIR · Plan de trabajo · Visita integral SSF</a:t>
+            </a:r>
+          </a:p>
+        </p:txBody>
+      </p:sp>
+      <p:sp>
+        <p:nvSpPr>
+          <p:cNvPr id="50" name="Rounded Rectangle 49"/>
           <p:cNvSpPr/>
           <p:nvPr/>
         </p:nvSpPr>
         <p:spPr>
           <a:xfrm>
-            <a:off x="5202936" y="5047488"/>
-            <a:ext cx="685800" cy="201168"/>
+            <a:off x="2798064" y="4937760"/>
+            <a:ext cx="2112264" cy="1371600"/>
           </a:xfrm>
           <a:prstGeom prst="roundRect">
             <a:avLst>
-              <a:gd name="adj" fmla="val 50000"/>
+              <a:gd name="adj" fmla="val 8000"/>
             </a:avLst>
           </a:prstGeom>
           <a:solidFill>
-            <a:srgbClr val="003D6F"/>
+            <a:srgbClr val="FFFFFF"/>
           </a:solidFill>
-          <a:ln>
-            <a:noFill/>
+          <a:ln w="12700">
+            <a:solidFill>
+              <a:srgbClr val="D5DDE7"/>
+            </a:solidFill>
           </a:ln>
           <a:effectLst/>
         </p:spPr>
@@ -5651,32 +5723,23 @@
           </a:fontRef>
         </p:style>
         <p:txBody>
-          <a:bodyPr rtlCol="0" anchor="ctr" lIns="0" rIns="0" tIns="0" bIns="0"/>
+          <a:bodyPr rtlCol="0" anchor="ctr"/>
           <a:lstStyle/>
           <a:p>
             <a:pPr algn="ctr"/>
-            <a:r>
-              <a:rPr sz="800" b="1">
-                <a:solidFill>
-                  <a:srgbClr val="FFFFFF"/>
-                </a:solidFill>
-                <a:latin typeface="Arial"/>
-              </a:rPr>
-              <a:t>NRP-20</a:t>
-            </a:r>
-          </a:p>
-        </p:txBody>
-      </p:sp>
-      <p:sp>
-        <p:nvSpPr>
-          <p:cNvPr id="49" name="TextBox 48"/>
+          </a:p>
+        </p:txBody>
+      </p:sp>
+      <p:sp>
+        <p:nvSpPr>
+          <p:cNvPr id="51" name="TextBox 50"/>
           <p:cNvSpPr txBox="1"/>
           <p:nvPr/>
         </p:nvSpPr>
         <p:spPr>
           <a:xfrm>
-            <a:off x="5202936" y="5285232"/>
-            <a:ext cx="685800" cy="201168"/>
+            <a:off x="2962656" y="5047488"/>
+            <a:ext cx="1783080" cy="292608"/>
           </a:xfrm>
           <a:prstGeom prst="rect">
             <a:avLst/>
@@ -5689,33 +5752,103 @@
           </a:bodyPr>
           <a:lstStyle/>
           <a:p>
-            <a:pPr algn="ctr"/>
-            <a:r>
-              <a:rPr sz="900" b="1">
+            <a:pPr algn="l"/>
+            <a:r>
+              <a:rPr sz="1600" b="1">
+                <a:solidFill>
+                  <a:srgbClr val="003D6F"/>
+                </a:solidFill>
+                <a:latin typeface="Century Gothic"/>
+              </a:rPr>
+              <a:t>NCB-022</a:t>
+            </a:r>
+          </a:p>
+        </p:txBody>
+      </p:sp>
+      <p:sp>
+        <p:nvSpPr>
+          <p:cNvPr id="52" name="TextBox 51"/>
+          <p:cNvSpPr txBox="1"/>
+          <p:nvPr/>
+        </p:nvSpPr>
+        <p:spPr>
+          <a:xfrm>
+            <a:off x="2962656" y="5358384"/>
+            <a:ext cx="1783080" cy="201168"/>
+          </a:xfrm>
+          <a:prstGeom prst="rect">
+            <a:avLst/>
+          </a:prstGeom>
+          <a:noFill/>
+        </p:spPr>
+        <p:txBody>
+          <a:bodyPr wrap="square" lIns="0" rIns="0" tIns="0" bIns="0" anchor="t">
+            <a:spAutoFit/>
+          </a:bodyPr>
+          <a:lstStyle/>
+          <a:p>
+            <a:pPr algn="l"/>
+            <a:r>
+              <a:rPr sz="1000" b="1">
                 <a:solidFill>
                   <a:srgbClr val="C62828"/>
                 </a:solidFill>
                 <a:latin typeface="Arial"/>
               </a:rPr>
-              <a:t>4 veces</a:t>
-            </a:r>
-          </a:p>
-        </p:txBody>
-      </p:sp>
-      <p:sp>
-        <p:nvSpPr>
-          <p:cNvPr id="50" name="Rounded Rectangle 49"/>
+              <a:t>3 veces · 2 entidades</a:t>
+            </a:r>
+          </a:p>
+        </p:txBody>
+      </p:sp>
+      <p:sp>
+        <p:nvSpPr>
+          <p:cNvPr id="53" name="TextBox 52"/>
+          <p:cNvSpPr txBox="1"/>
+          <p:nvPr/>
+        </p:nvSpPr>
+        <p:spPr>
+          <a:xfrm>
+            <a:off x="2962656" y="5614416"/>
+            <a:ext cx="1783080" cy="640080"/>
+          </a:xfrm>
+          <a:prstGeom prst="rect">
+            <a:avLst/>
+          </a:prstGeom>
+          <a:noFill/>
+        </p:spPr>
+        <p:txBody>
+          <a:bodyPr wrap="square" lIns="0" rIns="0" tIns="0" bIns="0" anchor="t">
+            <a:spAutoFit/>
+          </a:bodyPr>
+          <a:lstStyle/>
+          <a:p>
+            <a:pPr algn="l"/>
+            <a:r>
+              <a:rPr sz="900" b="0">
+                <a:solidFill>
+                  <a:srgbClr val="5B6B7B"/>
+                </a:solidFill>
+                <a:latin typeface="Arial"/>
+              </a:rPr>
+              <a:t>Cartera · Pérdida Esperada · Remisiones SSF · Migración</a:t>
+            </a:r>
+          </a:p>
+        </p:txBody>
+      </p:sp>
+      <p:sp>
+        <p:nvSpPr>
+          <p:cNvPr id="54" name="Rounded Rectangle 53"/>
           <p:cNvSpPr/>
           <p:nvPr/>
         </p:nvSpPr>
         <p:spPr>
           <a:xfrm>
-            <a:off x="6181344" y="4937760"/>
-            <a:ext cx="5477256" cy="621792"/>
+            <a:off x="5047488" y="4937760"/>
+            <a:ext cx="2112264" cy="1371600"/>
           </a:xfrm>
           <a:prstGeom prst="roundRect">
             <a:avLst>
-              <a:gd name="adj" fmla="val 12000"/>
+              <a:gd name="adj" fmla="val 8000"/>
             </a:avLst>
           </a:prstGeom>
           <a:solidFill>
@@ -5752,14 +5885,14 @@
       </p:sp>
       <p:sp>
         <p:nvSpPr>
-          <p:cNvPr id="51" name="TextBox 50"/>
+          <p:cNvPr id="55" name="TextBox 54"/>
           <p:cNvSpPr txBox="1"/>
           <p:nvPr/>
         </p:nvSpPr>
         <p:spPr>
           <a:xfrm>
-            <a:off x="6345936" y="4992624"/>
-            <a:ext cx="4471416" cy="512064"/>
+            <a:off x="5212079" y="5047488"/>
+            <a:ext cx="1783080" cy="292608"/>
           </a:xfrm>
           <a:prstGeom prst="rect">
             <a:avLst/>
@@ -5767,22 +5900,80 @@
           <a:noFill/>
         </p:spPr>
         <p:txBody>
-          <a:bodyPr wrap="square" lIns="0" rIns="0" tIns="0" bIns="0" anchor="ctr">
+          <a:bodyPr wrap="square" lIns="0" rIns="0" tIns="0" bIns="0" anchor="t">
             <a:spAutoFit/>
           </a:bodyPr>
           <a:lstStyle/>
           <a:p>
             <a:pPr algn="l"/>
             <a:r>
-              <a:rPr sz="1200" b="1">
+              <a:rPr sz="1600" b="1">
                 <a:solidFill>
-                  <a:srgbClr val="1F2A37"/>
+                  <a:srgbClr val="003D6F"/>
+                </a:solidFill>
+                <a:latin typeface="Century Gothic"/>
+              </a:rPr>
+              <a:t>NRP-24</a:t>
+            </a:r>
+          </a:p>
+        </p:txBody>
+      </p:sp>
+      <p:sp>
+        <p:nvSpPr>
+          <p:cNvPr id="56" name="TextBox 55"/>
+          <p:cNvSpPr txBox="1"/>
+          <p:nvPr/>
+        </p:nvSpPr>
+        <p:spPr>
+          <a:xfrm>
+            <a:off x="5212079" y="5358384"/>
+            <a:ext cx="1783080" cy="201168"/>
+          </a:xfrm>
+          <a:prstGeom prst="rect">
+            <a:avLst/>
+          </a:prstGeom>
+          <a:noFill/>
+        </p:spPr>
+        <p:txBody>
+          <a:bodyPr wrap="square" lIns="0" rIns="0" tIns="0" bIns="0" anchor="t">
+            <a:spAutoFit/>
+          </a:bodyPr>
+          <a:lstStyle/>
+          <a:p>
+            <a:pPr algn="l"/>
+            <a:r>
+              <a:rPr sz="1000" b="1">
+                <a:solidFill>
+                  <a:srgbClr val="C62828"/>
                 </a:solidFill>
                 <a:latin typeface="Arial"/>
               </a:rPr>
-              <a:t>Riesgo de crédito</a:t>
-            </a:r>
-          </a:p>
+              <a:t>3 veces · 2 entidades</a:t>
+            </a:r>
+          </a:p>
+        </p:txBody>
+      </p:sp>
+      <p:sp>
+        <p:nvSpPr>
+          <p:cNvPr id="57" name="TextBox 56"/>
+          <p:cNvSpPr txBox="1"/>
+          <p:nvPr/>
+        </p:nvSpPr>
+        <p:spPr>
+          <a:xfrm>
+            <a:off x="5212079" y="5614416"/>
+            <a:ext cx="1783080" cy="640080"/>
+          </a:xfrm>
+          <a:prstGeom prst="rect">
+            <a:avLst/>
+          </a:prstGeom>
+          <a:noFill/>
+        </p:spPr>
+        <p:txBody>
+          <a:bodyPr wrap="square" lIns="0" rIns="0" tIns="0" bIns="0" anchor="t">
+            <a:spAutoFit/>
+          </a:bodyPr>
+          <a:lstStyle/>
           <a:p>
             <a:pPr algn="l"/>
             <a:r>
@@ -5792,32 +5983,34 @@
                 </a:solidFill>
                 <a:latin typeface="Arial"/>
               </a:rPr>
-              <a:t>Cartera y reservas · Pérdida Esperada · Remisiones a SSF · Matriz de migración</a:t>
-            </a:r>
-          </a:p>
-        </p:txBody>
-      </p:sp>
-      <p:sp>
-        <p:nvSpPr>
-          <p:cNvPr id="52" name="Rounded Rectangle 51"/>
+              <a:t>Plan de Continuidad (BCP/DRP) · Actas del 16 de octubre</a:t>
+            </a:r>
+          </a:p>
+        </p:txBody>
+      </p:sp>
+      <p:sp>
+        <p:nvSpPr>
+          <p:cNvPr id="58" name="Rounded Rectangle 57"/>
           <p:cNvSpPr/>
           <p:nvPr/>
         </p:nvSpPr>
         <p:spPr>
           <a:xfrm>
-            <a:off x="10835640" y="5047488"/>
-            <a:ext cx="685800" cy="201168"/>
+            <a:off x="7296912" y="4937760"/>
+            <a:ext cx="2112264" cy="1371600"/>
           </a:xfrm>
           <a:prstGeom prst="roundRect">
             <a:avLst>
-              <a:gd name="adj" fmla="val 50000"/>
+              <a:gd name="adj" fmla="val 8000"/>
             </a:avLst>
           </a:prstGeom>
           <a:solidFill>
-            <a:srgbClr val="003D6F"/>
+            <a:srgbClr val="FFFFFF"/>
           </a:solidFill>
-          <a:ln>
-            <a:noFill/>
+          <a:ln w="12700">
+            <a:solidFill>
+              <a:srgbClr val="D5DDE7"/>
+            </a:solidFill>
           </a:ln>
           <a:effectLst/>
         </p:spPr>
@@ -5836,32 +6029,93 @@
           </a:fontRef>
         </p:style>
         <p:txBody>
-          <a:bodyPr rtlCol="0" anchor="ctr" lIns="0" rIns="0" tIns="0" bIns="0"/>
+          <a:bodyPr rtlCol="0" anchor="ctr"/>
           <a:lstStyle/>
           <a:p>
             <a:pPr algn="ctr"/>
-            <a:r>
-              <a:rPr sz="800" b="1">
+          </a:p>
+        </p:txBody>
+      </p:sp>
+      <p:sp>
+        <p:nvSpPr>
+          <p:cNvPr id="59" name="TextBox 58"/>
+          <p:cNvSpPr txBox="1"/>
+          <p:nvPr/>
+        </p:nvSpPr>
+        <p:spPr>
+          <a:xfrm>
+            <a:off x="7461504" y="5047488"/>
+            <a:ext cx="1783080" cy="292608"/>
+          </a:xfrm>
+          <a:prstGeom prst="rect">
+            <a:avLst/>
+          </a:prstGeom>
+          <a:noFill/>
+        </p:spPr>
+        <p:txBody>
+          <a:bodyPr wrap="square" lIns="0" rIns="0" tIns="0" bIns="0" anchor="t">
+            <a:spAutoFit/>
+          </a:bodyPr>
+          <a:lstStyle/>
+          <a:p>
+            <a:pPr algn="l"/>
+            <a:r>
+              <a:rPr sz="1600" b="1">
                 <a:solidFill>
-                  <a:srgbClr val="FFFFFF"/>
+                  <a:srgbClr val="003D6F"/>
+                </a:solidFill>
+                <a:latin typeface="Century Gothic"/>
+              </a:rPr>
+              <a:t>NPB4-49</a:t>
+            </a:r>
+          </a:p>
+        </p:txBody>
+      </p:sp>
+      <p:sp>
+        <p:nvSpPr>
+          <p:cNvPr id="60" name="TextBox 59"/>
+          <p:cNvSpPr txBox="1"/>
+          <p:nvPr/>
+        </p:nvSpPr>
+        <p:spPr>
+          <a:xfrm>
+            <a:off x="7461504" y="5358384"/>
+            <a:ext cx="1783080" cy="201168"/>
+          </a:xfrm>
+          <a:prstGeom prst="rect">
+            <a:avLst/>
+          </a:prstGeom>
+          <a:noFill/>
+        </p:spPr>
+        <p:txBody>
+          <a:bodyPr wrap="square" lIns="0" rIns="0" tIns="0" bIns="0" anchor="t">
+            <a:spAutoFit/>
+          </a:bodyPr>
+          <a:lstStyle/>
+          <a:p>
+            <a:pPr algn="l"/>
+            <a:r>
+              <a:rPr sz="1000" b="1">
+                <a:solidFill>
+                  <a:srgbClr val="5B6B7B"/>
                 </a:solidFill>
                 <a:latin typeface="Arial"/>
               </a:rPr>
-              <a:t>NCB-022</a:t>
-            </a:r>
-          </a:p>
-        </p:txBody>
-      </p:sp>
-      <p:sp>
-        <p:nvSpPr>
-          <p:cNvPr id="53" name="TextBox 52"/>
+              <a:t>2 veces · 2 entidades</a:t>
+            </a:r>
+          </a:p>
+        </p:txBody>
+      </p:sp>
+      <p:sp>
+        <p:nvSpPr>
+          <p:cNvPr id="61" name="TextBox 60"/>
           <p:cNvSpPr txBox="1"/>
           <p:nvPr/>
         </p:nvSpPr>
         <p:spPr>
           <a:xfrm>
-            <a:off x="10835640" y="5285232"/>
-            <a:ext cx="685800" cy="201168"/>
+            <a:off x="7461504" y="5614416"/>
+            <a:ext cx="1783080" cy="640080"/>
           </a:xfrm>
           <a:prstGeom prst="rect">
             <a:avLst/>
@@ -5874,33 +6128,33 @@
           </a:bodyPr>
           <a:lstStyle/>
           <a:p>
-            <a:pPr algn="ctr"/>
-            <a:r>
-              <a:rPr sz="900" b="1">
+            <a:pPr algn="l"/>
+            <a:r>
+              <a:rPr sz="900" b="0">
                 <a:solidFill>
-                  <a:srgbClr val="C62828"/>
+                  <a:srgbClr val="5B6B7B"/>
                 </a:solidFill>
                 <a:latin typeface="Arial"/>
               </a:rPr>
-              <a:t>3 veces</a:t>
-            </a:r>
-          </a:p>
-        </p:txBody>
-      </p:sp>
-      <p:sp>
-        <p:nvSpPr>
-          <p:cNvPr id="54" name="Rounded Rectangle 53"/>
+              <a:t>Escenarios de estrés · Concentración crediticia</a:t>
+            </a:r>
+          </a:p>
+        </p:txBody>
+      </p:sp>
+      <p:sp>
+        <p:nvSpPr>
+          <p:cNvPr id="62" name="Rounded Rectangle 61"/>
           <p:cNvSpPr/>
           <p:nvPr/>
         </p:nvSpPr>
         <p:spPr>
           <a:xfrm>
-            <a:off x="548640" y="5669280"/>
-            <a:ext cx="5477256" cy="621792"/>
+            <a:off x="9546336" y="4937760"/>
+            <a:ext cx="2112264" cy="1371600"/>
           </a:xfrm>
           <a:prstGeom prst="roundRect">
             <a:avLst>
-              <a:gd name="adj" fmla="val 12000"/>
+              <a:gd name="adj" fmla="val 8000"/>
             </a:avLst>
           </a:prstGeom>
           <a:solidFill>
@@ -5937,104 +6191,14 @@
       </p:sp>
       <p:sp>
         <p:nvSpPr>
-          <p:cNvPr id="55" name="TextBox 54"/>
+          <p:cNvPr id="63" name="TextBox 62"/>
           <p:cNvSpPr txBox="1"/>
           <p:nvPr/>
         </p:nvSpPr>
         <p:spPr>
           <a:xfrm>
-            <a:off x="713232" y="5724144"/>
-            <a:ext cx="4471416" cy="512064"/>
-          </a:xfrm>
-          <a:prstGeom prst="rect">
-            <a:avLst/>
-          </a:prstGeom>
-          <a:noFill/>
-        </p:spPr>
-        <p:txBody>
-          <a:bodyPr wrap="square" lIns="0" rIns="0" tIns="0" bIns="0" anchor="ctr">
-            <a:spAutoFit/>
-          </a:bodyPr>
-          <a:lstStyle/>
-          <a:p>
-            <a:pPr algn="l"/>
-            <a:r>
-              <a:rPr sz="1200" b="1">
-                <a:solidFill>
-                  <a:srgbClr val="1F2A37"/>
-                </a:solidFill>
-                <a:latin typeface="Arial"/>
-              </a:rPr>
-              <a:t>Plan de Continuidad (BCP/DRP)</a:t>
-            </a:r>
-          </a:p>
-        </p:txBody>
-      </p:sp>
-      <p:sp>
-        <p:nvSpPr>
-          <p:cNvPr id="56" name="Rounded Rectangle 55"/>
-          <p:cNvSpPr/>
-          <p:nvPr/>
-        </p:nvSpPr>
-        <p:spPr>
-          <a:xfrm>
-            <a:off x="5202936" y="5779008"/>
-            <a:ext cx="685800" cy="201168"/>
-          </a:xfrm>
-          <a:prstGeom prst="roundRect">
-            <a:avLst>
-              <a:gd name="adj" fmla="val 50000"/>
-            </a:avLst>
-          </a:prstGeom>
-          <a:solidFill>
-            <a:srgbClr val="003D6F"/>
-          </a:solidFill>
-          <a:ln>
-            <a:noFill/>
-          </a:ln>
-          <a:effectLst/>
-        </p:spPr>
-        <p:style>
-          <a:lnRef idx="1">
-            <a:schemeClr val="accent1"/>
-          </a:lnRef>
-          <a:fillRef idx="3">
-            <a:schemeClr val="accent1"/>
-          </a:fillRef>
-          <a:effectRef idx="2">
-            <a:schemeClr val="accent1"/>
-          </a:effectRef>
-          <a:fontRef idx="minor">
-            <a:schemeClr val="lt1"/>
-          </a:fontRef>
-        </p:style>
-        <p:txBody>
-          <a:bodyPr rtlCol="0" anchor="ctr" lIns="0" rIns="0" tIns="0" bIns="0"/>
-          <a:lstStyle/>
-          <a:p>
-            <a:pPr algn="ctr"/>
-            <a:r>
-              <a:rPr sz="800" b="1">
-                <a:solidFill>
-                  <a:srgbClr val="FFFFFF"/>
-                </a:solidFill>
-                <a:latin typeface="Arial"/>
-              </a:rPr>
-              <a:t>NRP-24</a:t>
-            </a:r>
-          </a:p>
-        </p:txBody>
-      </p:sp>
-      <p:sp>
-        <p:nvSpPr>
-          <p:cNvPr id="57" name="TextBox 56"/>
-          <p:cNvSpPr txBox="1"/>
-          <p:nvPr/>
-        </p:nvSpPr>
-        <p:spPr>
-          <a:xfrm>
-            <a:off x="5202936" y="6016752"/>
-            <a:ext cx="685800" cy="201168"/>
+            <a:off x="9710928" y="5047488"/>
+            <a:ext cx="1783080" cy="292608"/>
           </a:xfrm>
           <a:prstGeom prst="rect">
             <a:avLst/>
@@ -6047,167 +6211,29 @@
           </a:bodyPr>
           <a:lstStyle/>
           <a:p>
-            <a:pPr algn="ctr"/>
-            <a:r>
-              <a:rPr sz="900" b="1">
+            <a:pPr algn="l"/>
+            <a:r>
+              <a:rPr sz="1600" b="1">
                 <a:solidFill>
-                  <a:srgbClr val="C62828"/>
+                  <a:srgbClr val="003D6F"/>
                 </a:solidFill>
-                <a:latin typeface="Arial"/>
+                <a:latin typeface="Century Gothic"/>
               </a:rPr>
-              <a:t>3 veces</a:t>
-            </a:r>
-          </a:p>
-        </p:txBody>
-      </p:sp>
-      <p:sp>
-        <p:nvSpPr>
-          <p:cNvPr id="58" name="Rounded Rectangle 57"/>
-          <p:cNvSpPr/>
-          <p:nvPr/>
-        </p:nvSpPr>
-        <p:spPr>
-          <a:xfrm>
-            <a:off x="6181344" y="5669280"/>
-            <a:ext cx="5477256" cy="621792"/>
-          </a:xfrm>
-          <a:prstGeom prst="roundRect">
-            <a:avLst>
-              <a:gd name="adj" fmla="val 12000"/>
-            </a:avLst>
-          </a:prstGeom>
-          <a:solidFill>
-            <a:srgbClr val="FFFFFF"/>
-          </a:solidFill>
-          <a:ln w="12700">
-            <a:solidFill>
-              <a:srgbClr val="D5DDE7"/>
-            </a:solidFill>
-          </a:ln>
-          <a:effectLst/>
-        </p:spPr>
-        <p:style>
-          <a:lnRef idx="1">
-            <a:schemeClr val="accent1"/>
-          </a:lnRef>
-          <a:fillRef idx="3">
-            <a:schemeClr val="accent1"/>
-          </a:fillRef>
-          <a:effectRef idx="2">
-            <a:schemeClr val="accent1"/>
-          </a:effectRef>
-          <a:fontRef idx="minor">
-            <a:schemeClr val="lt1"/>
-          </a:fontRef>
-        </p:style>
-        <p:txBody>
-          <a:bodyPr rtlCol="0" anchor="ctr"/>
-          <a:lstStyle/>
-          <a:p>
-            <a:pPr algn="ctr"/>
-          </a:p>
-        </p:txBody>
-      </p:sp>
-      <p:sp>
-        <p:nvSpPr>
-          <p:cNvPr id="59" name="TextBox 58"/>
+              <a:t>NRP-17</a:t>
+            </a:r>
+          </a:p>
+        </p:txBody>
+      </p:sp>
+      <p:sp>
+        <p:nvSpPr>
+          <p:cNvPr id="64" name="TextBox 63"/>
           <p:cNvSpPr txBox="1"/>
           <p:nvPr/>
         </p:nvSpPr>
         <p:spPr>
           <a:xfrm>
-            <a:off x="6345936" y="5724144"/>
-            <a:ext cx="4471416" cy="512064"/>
-          </a:xfrm>
-          <a:prstGeom prst="rect">
-            <a:avLst/>
-          </a:prstGeom>
-          <a:noFill/>
-        </p:spPr>
-        <p:txBody>
-          <a:bodyPr wrap="square" lIns="0" rIns="0" tIns="0" bIns="0" anchor="ctr">
-            <a:spAutoFit/>
-          </a:bodyPr>
-          <a:lstStyle/>
-          <a:p>
-            <a:pPr algn="l"/>
-            <a:r>
-              <a:rPr sz="1200" b="1">
-                <a:solidFill>
-                  <a:srgbClr val="1F2A37"/>
-                </a:solidFill>
-                <a:latin typeface="Arial"/>
-              </a:rPr>
-              <a:t>Gobierno Corporativo</a:t>
-            </a:r>
-          </a:p>
-        </p:txBody>
-      </p:sp>
-      <p:sp>
-        <p:nvSpPr>
-          <p:cNvPr id="60" name="Rounded Rectangle 59"/>
-          <p:cNvSpPr/>
-          <p:nvPr/>
-        </p:nvSpPr>
-        <p:spPr>
-          <a:xfrm>
-            <a:off x="10835640" y="5779008"/>
-            <a:ext cx="685800" cy="201168"/>
-          </a:xfrm>
-          <a:prstGeom prst="roundRect">
-            <a:avLst>
-              <a:gd name="adj" fmla="val 50000"/>
-            </a:avLst>
-          </a:prstGeom>
-          <a:solidFill>
-            <a:srgbClr val="003D6F"/>
-          </a:solidFill>
-          <a:ln>
-            <a:noFill/>
-          </a:ln>
-          <a:effectLst/>
-        </p:spPr>
-        <p:style>
-          <a:lnRef idx="1">
-            <a:schemeClr val="accent1"/>
-          </a:lnRef>
-          <a:fillRef idx="3">
-            <a:schemeClr val="accent1"/>
-          </a:fillRef>
-          <a:effectRef idx="2">
-            <a:schemeClr val="accent1"/>
-          </a:effectRef>
-          <a:fontRef idx="minor">
-            <a:schemeClr val="lt1"/>
-          </a:fontRef>
-        </p:style>
-        <p:txBody>
-          <a:bodyPr rtlCol="0" anchor="ctr" lIns="0" rIns="0" tIns="0" bIns="0"/>
-          <a:lstStyle/>
-          <a:p>
-            <a:pPr algn="ctr"/>
-            <a:r>
-              <a:rPr sz="800" b="1">
-                <a:solidFill>
-                  <a:srgbClr val="FFFFFF"/>
-                </a:solidFill>
-                <a:latin typeface="Arial"/>
-              </a:rPr>
-              <a:t>NRP-17</a:t>
-            </a:r>
-          </a:p>
-        </p:txBody>
-      </p:sp>
-      <p:sp>
-        <p:nvSpPr>
-          <p:cNvPr id="61" name="TextBox 60"/>
-          <p:cNvSpPr txBox="1"/>
-          <p:nvPr/>
-        </p:nvSpPr>
-        <p:spPr>
-          <a:xfrm>
-            <a:off x="10835640" y="6016752"/>
-            <a:ext cx="685800" cy="201168"/>
+            <a:off x="9710928" y="5358384"/>
+            <a:ext cx="1783080" cy="201168"/>
           </a:xfrm>
           <a:prstGeom prst="rect">
             <a:avLst/>
@@ -6220,22 +6246,57 @@
           </a:bodyPr>
           <a:lstStyle/>
           <a:p>
-            <a:pPr algn="ctr"/>
-            <a:r>
-              <a:rPr sz="900" b="1">
+            <a:pPr algn="l"/>
+            <a:r>
+              <a:rPr sz="1000" b="1">
                 <a:solidFill>
                   <a:srgbClr val="5B6B7B"/>
                 </a:solidFill>
                 <a:latin typeface="Arial"/>
               </a:rPr>
-              <a:t>2 veces</a:t>
-            </a:r>
-          </a:p>
-        </p:txBody>
-      </p:sp>
-      <p:sp>
-        <p:nvSpPr>
-          <p:cNvPr id="62" name="Fuente"/>
+              <a:t>2 veces · 2 entidades</a:t>
+            </a:r>
+          </a:p>
+        </p:txBody>
+      </p:sp>
+      <p:sp>
+        <p:nvSpPr>
+          <p:cNvPr id="65" name="TextBox 64"/>
+          <p:cNvSpPr txBox="1"/>
+          <p:nvPr/>
+        </p:nvSpPr>
+        <p:spPr>
+          <a:xfrm>
+            <a:off x="9710928" y="5614416"/>
+            <a:ext cx="1783080" cy="640080"/>
+          </a:xfrm>
+          <a:prstGeom prst="rect">
+            <a:avLst/>
+          </a:prstGeom>
+          <a:noFill/>
+        </p:spPr>
+        <p:txBody>
+          <a:bodyPr wrap="square" lIns="0" rIns="0" tIns="0" bIns="0" anchor="t">
+            <a:spAutoFit/>
+          </a:bodyPr>
+          <a:lstStyle/>
+          <a:p>
+            <a:pPr algn="l"/>
+            <a:r>
+              <a:rPr sz="900" b="0">
+                <a:solidFill>
+                  <a:srgbClr val="5B6B7B"/>
+                </a:solidFill>
+                <a:latin typeface="Arial"/>
+              </a:rPr>
+              <a:t>Gobierno Corporativo</a:t>
+            </a:r>
+          </a:p>
+        </p:txBody>
+      </p:sp>
+      <p:sp>
+        <p:nvSpPr>
+          <p:cNvPr id="66" name="Fuente"/>
           <p:cNvSpPr txBox="1"/>
           <p:nvPr/>
         </p:nvSpPr>

--- a/presentacion-lunes/Resumen_Riesgos_2026_Opcion_B.pptx
+++ b/presentacion-lunes/Resumen_Riesgos_2026_Opcion_B.pptx
@@ -5054,7 +5054,7 @@
         <p:spPr>
           <a:xfrm>
             <a:off x="9326880" y="2011680"/>
-            <a:ext cx="2331720" cy="1234440"/>
+            <a:ext cx="2331720" cy="1097280"/>
           </a:xfrm>
           <a:prstGeom prst="roundRect">
             <a:avLst>
@@ -5099,8 +5099,8 @@
         </p:nvSpPr>
         <p:spPr>
           <a:xfrm>
-            <a:off x="9555480" y="2148840"/>
-            <a:ext cx="1874519" cy="228600"/>
+            <a:off x="9555480" y="2121408"/>
+            <a:ext cx="1874519" cy="201168"/>
           </a:xfrm>
           <a:prstGeom prst="rect">
             <a:avLst/>
@@ -5134,8 +5134,8 @@
         </p:nvSpPr>
         <p:spPr>
           <a:xfrm>
-            <a:off x="9555480" y="2313432"/>
-            <a:ext cx="1874519" cy="502920"/>
+            <a:off x="9528048" y="2377440"/>
+            <a:ext cx="685800" cy="594360"/>
           </a:xfrm>
           <a:prstGeom prst="rect">
             <a:avLst/>
@@ -5169,8 +5169,8 @@
         </p:nvSpPr>
         <p:spPr>
           <a:xfrm>
-            <a:off x="9555480" y="2862072"/>
-            <a:ext cx="1874519" cy="201168"/>
+            <a:off x="10222992" y="2395728"/>
+            <a:ext cx="1344167" cy="548640"/>
           </a:xfrm>
           <a:prstGeom prst="rect">
             <a:avLst/>
@@ -5178,14 +5178,14 @@
           <a:noFill/>
         </p:spPr>
         <p:txBody>
-          <a:bodyPr wrap="square" lIns="0" rIns="0" tIns="0" bIns="0" anchor="t">
+          <a:bodyPr wrap="square" lIns="0" rIns="0" tIns="0" bIns="0" anchor="ctr">
             <a:spAutoFit/>
           </a:bodyPr>
           <a:lstStyle/>
           <a:p>
             <a:pPr algn="l"/>
             <a:r>
-              <a:rPr sz="1200" b="1">
+              <a:rPr sz="1000" b="1">
                 <a:solidFill>
                   <a:srgbClr val="FFFFFF"/>
                 </a:solidFill>
@@ -5194,53 +5194,30 @@
               <a:t>visitas y auditorías</a:t>
             </a:r>
           </a:p>
-        </p:txBody>
-      </p:sp>
-      <p:sp>
-        <p:nvSpPr>
-          <p:cNvPr id="37" name="TextBox 36"/>
-          <p:cNvSpPr txBox="1"/>
-          <p:nvPr/>
-        </p:nvSpPr>
-        <p:spPr>
-          <a:xfrm>
-            <a:off x="9555480" y="3044952"/>
-            <a:ext cx="1874519" cy="182880"/>
-          </a:xfrm>
-          <a:prstGeom prst="rect">
-            <a:avLst/>
-          </a:prstGeom>
-          <a:noFill/>
-        </p:spPr>
-        <p:txBody>
-          <a:bodyPr wrap="square" lIns="0" rIns="0" tIns="0" bIns="0" anchor="t">
-            <a:spAutoFit/>
-          </a:bodyPr>
-          <a:lstStyle/>
           <a:p>
             <a:pPr algn="l"/>
             <a:r>
-              <a:rPr sz="1000" b="0">
+              <a:rPr sz="900" b="0">
                 <a:solidFill>
                   <a:srgbClr val="9CC3E8"/>
                 </a:solidFill>
                 <a:latin typeface="Arial"/>
               </a:rPr>
-              <a:t>26 temas distintos pedidos</a:t>
-            </a:r>
-          </a:p>
-        </p:txBody>
-      </p:sp>
-      <p:sp>
-        <p:nvSpPr>
-          <p:cNvPr id="38" name="Norma más auditada"/>
+              <a:t>26 temas distintos</a:t>
+            </a:r>
+          </a:p>
+        </p:txBody>
+      </p:sp>
+      <p:sp>
+        <p:nvSpPr>
+          <p:cNvPr id="37" name="Norma más auditada"/>
           <p:cNvSpPr/>
           <p:nvPr/>
         </p:nvSpPr>
         <p:spPr>
           <a:xfrm>
-            <a:off x="9326880" y="3383280"/>
-            <a:ext cx="2331720" cy="868680"/>
+            <a:off x="9326880" y="3218688"/>
+            <a:ext cx="2331720" cy="1033272"/>
           </a:xfrm>
           <a:prstGeom prst="roundRect">
             <a:avLst>
@@ -5279,14 +5256,93 @@
       </p:sp>
       <p:sp>
         <p:nvSpPr>
+          <p:cNvPr id="38" name="TextBox 37"/>
+          <p:cNvSpPr txBox="1"/>
+          <p:nvPr/>
+        </p:nvSpPr>
+        <p:spPr>
+          <a:xfrm>
+            <a:off x="9528048" y="3310128"/>
+            <a:ext cx="1929384" cy="182880"/>
+          </a:xfrm>
+          <a:prstGeom prst="rect">
+            <a:avLst/>
+          </a:prstGeom>
+          <a:noFill/>
+        </p:spPr>
+        <p:txBody>
+          <a:bodyPr wrap="square" lIns="0" rIns="0" tIns="0" bIns="0" anchor="t">
+            <a:spAutoFit/>
+          </a:bodyPr>
+          <a:lstStyle/>
+          <a:p>
+            <a:pPr algn="l"/>
+            <a:r>
+              <a:rPr sz="1000" b="1">
+                <a:solidFill>
+                  <a:srgbClr val="5B6B7B"/>
+                </a:solidFill>
+                <a:latin typeface="Arial"/>
+              </a:rPr>
+              <a:t>NORMA MÁS AUDITADA</a:t>
+            </a:r>
+          </a:p>
+        </p:txBody>
+      </p:sp>
+      <p:sp>
+        <p:nvSpPr>
           <p:cNvPr id="39" name="TextBox 38"/>
           <p:cNvSpPr txBox="1"/>
           <p:nvPr/>
         </p:nvSpPr>
         <p:spPr>
           <a:xfrm>
-            <a:off x="9555480" y="3493008"/>
-            <a:ext cx="1874519" cy="201168"/>
+            <a:off x="9528048" y="3493008"/>
+            <a:ext cx="1929384" cy="329184"/>
+          </a:xfrm>
+          <a:prstGeom prst="rect">
+            <a:avLst/>
+          </a:prstGeom>
+          <a:noFill/>
+        </p:spPr>
+        <p:txBody>
+          <a:bodyPr wrap="square" lIns="0" rIns="0" tIns="0" bIns="0" anchor="ctr">
+            <a:spAutoFit/>
+          </a:bodyPr>
+          <a:lstStyle/>
+          <a:p>
+            <a:pPr algn="l"/>
+            <a:r>
+              <a:rPr sz="2200" b="1">
+                <a:solidFill>
+                  <a:srgbClr val="003D6F"/>
+                </a:solidFill>
+                <a:latin typeface="Century Gothic"/>
+              </a:rPr>
+              <a:t>NRP-20</a:t>
+            </a:r>
+            <a:r>
+              <a:rPr sz="1100" b="1">
+                <a:solidFill>
+                  <a:srgbClr val="C62828"/>
+                </a:solidFill>
+                <a:latin typeface="Arial"/>
+              </a:rPr>
+              <a:t>  5 veces</a:t>
+            </a:r>
+          </a:p>
+        </p:txBody>
+      </p:sp>
+      <p:sp>
+        <p:nvSpPr>
+          <p:cNvPr id="40" name="TextBox 39"/>
+          <p:cNvSpPr txBox="1"/>
+          <p:nvPr/>
+        </p:nvSpPr>
+        <p:spPr>
+          <a:xfrm>
+            <a:off x="9528048" y="3822192"/>
+            <a:ext cx="1929384" cy="164592"/>
           </a:xfrm>
           <a:prstGeom prst="rect">
             <a:avLst/>
@@ -5301,90 +5357,185 @@
           <a:p>
             <a:pPr algn="l"/>
             <a:r>
-              <a:rPr sz="1000" b="1">
+              <a:rPr sz="900" b="0">
                 <a:solidFill>
                   <a:srgbClr val="5B6B7B"/>
                 </a:solidFill>
                 <a:latin typeface="Arial"/>
               </a:rPr>
-              <a:t>NORMA MÁS AUDITADA</a:t>
-            </a:r>
-          </a:p>
-        </p:txBody>
-      </p:sp>
-      <p:sp>
-        <p:nvSpPr>
-          <p:cNvPr id="40" name="TextBox 39"/>
-          <p:cNvSpPr txBox="1"/>
+              <a:t>La revisaron:</a:t>
+            </a:r>
+          </a:p>
+        </p:txBody>
+      </p:sp>
+      <p:sp>
+        <p:nvSpPr>
+          <p:cNvPr id="41" name="Rounded Rectangle 40"/>
+          <p:cNvSpPr/>
           <p:nvPr/>
         </p:nvSpPr>
         <p:spPr>
           <a:xfrm>
-            <a:off x="9555480" y="3675888"/>
-            <a:ext cx="1874519" cy="365760"/>
-          </a:xfrm>
-          <a:prstGeom prst="rect">
-            <a:avLst/>
-          </a:prstGeom>
-          <a:noFill/>
-        </p:spPr>
-        <p:txBody>
-          <a:bodyPr wrap="square" lIns="0" rIns="0" tIns="0" bIns="0" anchor="ctr">
-            <a:spAutoFit/>
-          </a:bodyPr>
-          <a:lstStyle/>
-          <a:p>
-            <a:pPr algn="l"/>
-            <a:r>
-              <a:rPr sz="2400" b="1">
-                <a:solidFill>
-                  <a:srgbClr val="003D6F"/>
-                </a:solidFill>
-                <a:latin typeface="Century Gothic"/>
-              </a:rPr>
-              <a:t>NRP-20</a:t>
-            </a:r>
-          </a:p>
-        </p:txBody>
-      </p:sp>
-      <p:sp>
-        <p:nvSpPr>
-          <p:cNvPr id="41" name="TextBox 40"/>
-          <p:cNvSpPr txBox="1"/>
-          <p:nvPr/>
-        </p:nvSpPr>
-        <p:spPr>
-          <a:xfrm>
-            <a:off x="9555480" y="4041648"/>
-            <a:ext cx="1874519" cy="182880"/>
-          </a:xfrm>
-          <a:prstGeom prst="rect">
-            <a:avLst/>
-          </a:prstGeom>
-          <a:noFill/>
-        </p:spPr>
-        <p:txBody>
-          <a:bodyPr wrap="square" lIns="0" rIns="0" tIns="0" bIns="0" anchor="t">
-            <a:spAutoFit/>
-          </a:bodyPr>
-          <a:lstStyle/>
-          <a:p>
-            <a:pPr algn="l"/>
-            <a:r>
-              <a:rPr sz="1000" b="0">
-                <a:solidFill>
-                  <a:srgbClr val="5B6B7B"/>
+            <a:off x="9528048" y="3995928"/>
+            <a:ext cx="612648" cy="219456"/>
+          </a:xfrm>
+          <a:prstGeom prst="roundRect">
+            <a:avLst>
+              <a:gd name="adj" fmla="val 50000"/>
+            </a:avLst>
+          </a:prstGeom>
+          <a:solidFill>
+            <a:srgbClr val="1565C0"/>
+          </a:solidFill>
+          <a:ln>
+            <a:noFill/>
+          </a:ln>
+          <a:effectLst/>
+        </p:spPr>
+        <p:style>
+          <a:lnRef idx="1">
+            <a:schemeClr val="accent1"/>
+          </a:lnRef>
+          <a:fillRef idx="3">
+            <a:schemeClr val="accent1"/>
+          </a:fillRef>
+          <a:effectRef idx="2">
+            <a:schemeClr val="accent1"/>
+          </a:effectRef>
+          <a:fontRef idx="minor">
+            <a:schemeClr val="lt1"/>
+          </a:fontRef>
+        </p:style>
+        <p:txBody>
+          <a:bodyPr rtlCol="0" anchor="ctr" lIns="0" rIns="0" tIns="0" bIns="0"/>
+          <a:lstStyle/>
+          <a:p>
+            <a:pPr algn="ctr"/>
+            <a:r>
+              <a:rPr sz="800" b="1">
+                <a:solidFill>
+                  <a:srgbClr val="FFFFFF"/>
                 </a:solidFill>
                 <a:latin typeface="Arial"/>
               </a:rPr>
-              <a:t>5 veces · 3 entidades</a:t>
-            </a:r>
-          </a:p>
-        </p:txBody>
-      </p:sp>
-      <p:sp>
-        <p:nvSpPr>
-          <p:cNvPr id="42" name="Oval 41"/>
+              <a:t>Interna ×2</a:t>
+            </a:r>
+          </a:p>
+        </p:txBody>
+      </p:sp>
+      <p:sp>
+        <p:nvSpPr>
+          <p:cNvPr id="42" name="Rounded Rectangle 41"/>
+          <p:cNvSpPr/>
+          <p:nvPr/>
+        </p:nvSpPr>
+        <p:spPr>
+          <a:xfrm>
+            <a:off x="10186416" y="3995928"/>
+            <a:ext cx="612648" cy="219456"/>
+          </a:xfrm>
+          <a:prstGeom prst="roundRect">
+            <a:avLst>
+              <a:gd name="adj" fmla="val 50000"/>
+            </a:avLst>
+          </a:prstGeom>
+          <a:solidFill>
+            <a:srgbClr val="E8871E"/>
+          </a:solidFill>
+          <a:ln>
+            <a:noFill/>
+          </a:ln>
+          <a:effectLst/>
+        </p:spPr>
+        <p:style>
+          <a:lnRef idx="1">
+            <a:schemeClr val="accent1"/>
+          </a:lnRef>
+          <a:fillRef idx="3">
+            <a:schemeClr val="accent1"/>
+          </a:fillRef>
+          <a:effectRef idx="2">
+            <a:schemeClr val="accent1"/>
+          </a:effectRef>
+          <a:fontRef idx="minor">
+            <a:schemeClr val="lt1"/>
+          </a:fontRef>
+        </p:style>
+        <p:txBody>
+          <a:bodyPr rtlCol="0" anchor="ctr" lIns="0" rIns="0" tIns="0" bIns="0"/>
+          <a:lstStyle/>
+          <a:p>
+            <a:pPr algn="ctr"/>
+            <a:r>
+              <a:rPr sz="800" b="1">
+                <a:solidFill>
+                  <a:srgbClr val="FFFFFF"/>
+                </a:solidFill>
+                <a:latin typeface="Arial"/>
+              </a:rPr>
+              <a:t>Externa ×1</a:t>
+            </a:r>
+          </a:p>
+        </p:txBody>
+      </p:sp>
+      <p:sp>
+        <p:nvSpPr>
+          <p:cNvPr id="43" name="Rounded Rectangle 42"/>
+          <p:cNvSpPr/>
+          <p:nvPr/>
+        </p:nvSpPr>
+        <p:spPr>
+          <a:xfrm>
+            <a:off x="10844784" y="3995928"/>
+            <a:ext cx="411480" cy="219456"/>
+          </a:xfrm>
+          <a:prstGeom prst="roundRect">
+            <a:avLst>
+              <a:gd name="adj" fmla="val 50000"/>
+            </a:avLst>
+          </a:prstGeom>
+          <a:solidFill>
+            <a:srgbClr val="2E9E5B"/>
+          </a:solidFill>
+          <a:ln>
+            <a:noFill/>
+          </a:ln>
+          <a:effectLst/>
+        </p:spPr>
+        <p:style>
+          <a:lnRef idx="1">
+            <a:schemeClr val="accent1"/>
+          </a:lnRef>
+          <a:fillRef idx="3">
+            <a:schemeClr val="accent1"/>
+          </a:fillRef>
+          <a:effectRef idx="2">
+            <a:schemeClr val="accent1"/>
+          </a:effectRef>
+          <a:fontRef idx="minor">
+            <a:schemeClr val="lt1"/>
+          </a:fontRef>
+        </p:style>
+        <p:txBody>
+          <a:bodyPr rtlCol="0" anchor="ctr" lIns="0" rIns="0" tIns="0" bIns="0"/>
+          <a:lstStyle/>
+          <a:p>
+            <a:pPr algn="ctr"/>
+            <a:r>
+              <a:rPr sz="800" b="1">
+                <a:solidFill>
+                  <a:srgbClr val="FFFFFF"/>
+                </a:solidFill>
+                <a:latin typeface="Arial"/>
+              </a:rPr>
+              <a:t>SSF ×2</a:t>
+            </a:r>
+          </a:p>
+        </p:txBody>
+      </p:sp>
+      <p:sp>
+        <p:nvSpPr>
+          <p:cNvPr id="44" name="Oval 43"/>
           <p:cNvSpPr/>
           <p:nvPr/>
         </p:nvSpPr>
@@ -5428,7 +5579,7 @@
       </p:sp>
       <p:pic>
         <p:nvPicPr>
-          <p:cNvPr id="43" name="Picture 42" descr="FaSyncAlt_white.png"/>
+          <p:cNvPr id="45" name="Picture 44" descr="FaSyncAlt_white.png"/>
           <p:cNvPicPr>
             <a:picLocks noChangeAspect="1"/>
           </p:cNvPicPr>
@@ -5452,7 +5603,7 @@
       </p:pic>
       <p:sp>
         <p:nvSpPr>
-          <p:cNvPr id="44" name="TextBox 43"/>
+          <p:cNvPr id="46" name="TextBox 45"/>
           <p:cNvSpPr txBox="1"/>
           <p:nvPr/>
         </p:nvSpPr>
@@ -5496,7 +5647,7 @@
       </p:sp>
       <p:sp>
         <p:nvSpPr>
-          <p:cNvPr id="45" name="TextBox 44"/>
+          <p:cNvPr id="47" name="TextBox 46"/>
           <p:cNvSpPr txBox="1"/>
           <p:nvPr/>
         </p:nvSpPr>
@@ -5531,14 +5682,14 @@
       </p:sp>
       <p:sp>
         <p:nvSpPr>
-          <p:cNvPr id="46" name="Rounded Rectangle 45"/>
+          <p:cNvPr id="48" name="Rounded Rectangle 47"/>
           <p:cNvSpPr/>
           <p:nvPr/>
         </p:nvSpPr>
         <p:spPr>
           <a:xfrm>
             <a:off x="548640" y="4937760"/>
-            <a:ext cx="2112264" cy="1371600"/>
+            <a:ext cx="2112264" cy="1463040"/>
           </a:xfrm>
           <a:prstGeom prst="roundRect">
             <a:avLst>
@@ -5579,7 +5730,7 @@
       </p:sp>
       <p:sp>
         <p:nvSpPr>
-          <p:cNvPr id="47" name="TextBox 46"/>
+          <p:cNvPr id="49" name="TextBox 48"/>
           <p:cNvSpPr txBox="1"/>
           <p:nvPr/>
         </p:nvSpPr>
@@ -5614,7 +5765,7 @@
       </p:sp>
       <p:sp>
         <p:nvSpPr>
-          <p:cNvPr id="48" name="TextBox 47"/>
+          <p:cNvPr id="50" name="TextBox 49"/>
           <p:cNvSpPr txBox="1"/>
           <p:nvPr/>
         </p:nvSpPr>
@@ -5649,14 +5800,14 @@
       </p:sp>
       <p:sp>
         <p:nvSpPr>
-          <p:cNvPr id="49" name="TextBox 48"/>
+          <p:cNvPr id="51" name="TextBox 50"/>
           <p:cNvSpPr txBox="1"/>
           <p:nvPr/>
         </p:nvSpPr>
         <p:spPr>
           <a:xfrm>
-            <a:off x="713232" y="5614416"/>
-            <a:ext cx="1783080" cy="640080"/>
+            <a:off x="713232" y="5596128"/>
+            <a:ext cx="1783080" cy="457200"/>
           </a:xfrm>
           <a:prstGeom prst="rect">
             <a:avLst/>
@@ -5684,14 +5835,179 @@
       </p:sp>
       <p:sp>
         <p:nvSpPr>
-          <p:cNvPr id="50" name="Rounded Rectangle 49"/>
+          <p:cNvPr id="52" name="Rounded Rectangle 51"/>
           <p:cNvSpPr/>
           <p:nvPr/>
         </p:nvSpPr>
         <p:spPr>
           <a:xfrm>
+            <a:off x="713232" y="6080760"/>
+            <a:ext cx="612648" cy="219456"/>
+          </a:xfrm>
+          <a:prstGeom prst="roundRect">
+            <a:avLst>
+              <a:gd name="adj" fmla="val 50000"/>
+            </a:avLst>
+          </a:prstGeom>
+          <a:solidFill>
+            <a:srgbClr val="1565C0"/>
+          </a:solidFill>
+          <a:ln>
+            <a:noFill/>
+          </a:ln>
+          <a:effectLst/>
+        </p:spPr>
+        <p:style>
+          <a:lnRef idx="1">
+            <a:schemeClr val="accent1"/>
+          </a:lnRef>
+          <a:fillRef idx="3">
+            <a:schemeClr val="accent1"/>
+          </a:fillRef>
+          <a:effectRef idx="2">
+            <a:schemeClr val="accent1"/>
+          </a:effectRef>
+          <a:fontRef idx="minor">
+            <a:schemeClr val="lt1"/>
+          </a:fontRef>
+        </p:style>
+        <p:txBody>
+          <a:bodyPr rtlCol="0" anchor="ctr" lIns="0" rIns="0" tIns="0" bIns="0"/>
+          <a:lstStyle/>
+          <a:p>
+            <a:pPr algn="ctr"/>
+            <a:r>
+              <a:rPr sz="800" b="1">
+                <a:solidFill>
+                  <a:srgbClr val="FFFFFF"/>
+                </a:solidFill>
+                <a:latin typeface="Arial"/>
+              </a:rPr>
+              <a:t>Interna ×2</a:t>
+            </a:r>
+          </a:p>
+        </p:txBody>
+      </p:sp>
+      <p:sp>
+        <p:nvSpPr>
+          <p:cNvPr id="53" name="Rounded Rectangle 52"/>
+          <p:cNvSpPr/>
+          <p:nvPr/>
+        </p:nvSpPr>
+        <p:spPr>
+          <a:xfrm>
+            <a:off x="1371600" y="6080760"/>
+            <a:ext cx="612648" cy="219456"/>
+          </a:xfrm>
+          <a:prstGeom prst="roundRect">
+            <a:avLst>
+              <a:gd name="adj" fmla="val 50000"/>
+            </a:avLst>
+          </a:prstGeom>
+          <a:solidFill>
+            <a:srgbClr val="E8871E"/>
+          </a:solidFill>
+          <a:ln>
+            <a:noFill/>
+          </a:ln>
+          <a:effectLst/>
+        </p:spPr>
+        <p:style>
+          <a:lnRef idx="1">
+            <a:schemeClr val="accent1"/>
+          </a:lnRef>
+          <a:fillRef idx="3">
+            <a:schemeClr val="accent1"/>
+          </a:fillRef>
+          <a:effectRef idx="2">
+            <a:schemeClr val="accent1"/>
+          </a:effectRef>
+          <a:fontRef idx="minor">
+            <a:schemeClr val="lt1"/>
+          </a:fontRef>
+        </p:style>
+        <p:txBody>
+          <a:bodyPr rtlCol="0" anchor="ctr" lIns="0" rIns="0" tIns="0" bIns="0"/>
+          <a:lstStyle/>
+          <a:p>
+            <a:pPr algn="ctr"/>
+            <a:r>
+              <a:rPr sz="800" b="1">
+                <a:solidFill>
+                  <a:srgbClr val="FFFFFF"/>
+                </a:solidFill>
+                <a:latin typeface="Arial"/>
+              </a:rPr>
+              <a:t>Externa ×1</a:t>
+            </a:r>
+          </a:p>
+        </p:txBody>
+      </p:sp>
+      <p:sp>
+        <p:nvSpPr>
+          <p:cNvPr id="54" name="Rounded Rectangle 53"/>
+          <p:cNvSpPr/>
+          <p:nvPr/>
+        </p:nvSpPr>
+        <p:spPr>
+          <a:xfrm>
+            <a:off x="2029968" y="6080760"/>
+            <a:ext cx="411480" cy="219456"/>
+          </a:xfrm>
+          <a:prstGeom prst="roundRect">
+            <a:avLst>
+              <a:gd name="adj" fmla="val 50000"/>
+            </a:avLst>
+          </a:prstGeom>
+          <a:solidFill>
+            <a:srgbClr val="2E9E5B"/>
+          </a:solidFill>
+          <a:ln>
+            <a:noFill/>
+          </a:ln>
+          <a:effectLst/>
+        </p:spPr>
+        <p:style>
+          <a:lnRef idx="1">
+            <a:schemeClr val="accent1"/>
+          </a:lnRef>
+          <a:fillRef idx="3">
+            <a:schemeClr val="accent1"/>
+          </a:fillRef>
+          <a:effectRef idx="2">
+            <a:schemeClr val="accent1"/>
+          </a:effectRef>
+          <a:fontRef idx="minor">
+            <a:schemeClr val="lt1"/>
+          </a:fontRef>
+        </p:style>
+        <p:txBody>
+          <a:bodyPr rtlCol="0" anchor="ctr" lIns="0" rIns="0" tIns="0" bIns="0"/>
+          <a:lstStyle/>
+          <a:p>
+            <a:pPr algn="ctr"/>
+            <a:r>
+              <a:rPr sz="800" b="1">
+                <a:solidFill>
+                  <a:srgbClr val="FFFFFF"/>
+                </a:solidFill>
+                <a:latin typeface="Arial"/>
+              </a:rPr>
+              <a:t>SSF ×2</a:t>
+            </a:r>
+          </a:p>
+        </p:txBody>
+      </p:sp>
+      <p:sp>
+        <p:nvSpPr>
+          <p:cNvPr id="55" name="Rounded Rectangle 54"/>
+          <p:cNvSpPr/>
+          <p:nvPr/>
+        </p:nvSpPr>
+        <p:spPr>
+          <a:xfrm>
             <a:off x="2798064" y="4937760"/>
-            <a:ext cx="2112264" cy="1371600"/>
+            <a:ext cx="2112264" cy="1463040"/>
           </a:xfrm>
           <a:prstGeom prst="roundRect">
             <a:avLst>
@@ -5732,7 +6048,7 @@
       </p:sp>
       <p:sp>
         <p:nvSpPr>
-          <p:cNvPr id="51" name="TextBox 50"/>
+          <p:cNvPr id="56" name="TextBox 55"/>
           <p:cNvSpPr txBox="1"/>
           <p:nvPr/>
         </p:nvSpPr>
@@ -5767,7 +6083,7 @@
       </p:sp>
       <p:sp>
         <p:nvSpPr>
-          <p:cNvPr id="52" name="TextBox 51"/>
+          <p:cNvPr id="57" name="TextBox 56"/>
           <p:cNvSpPr txBox="1"/>
           <p:nvPr/>
         </p:nvSpPr>
@@ -5802,14 +6118,14 @@
       </p:sp>
       <p:sp>
         <p:nvSpPr>
-          <p:cNvPr id="53" name="TextBox 52"/>
+          <p:cNvPr id="58" name="TextBox 57"/>
           <p:cNvSpPr txBox="1"/>
           <p:nvPr/>
         </p:nvSpPr>
         <p:spPr>
           <a:xfrm>
-            <a:off x="2962656" y="5614416"/>
-            <a:ext cx="1783080" cy="640080"/>
+            <a:off x="2962656" y="5596128"/>
+            <a:ext cx="1783080" cy="457200"/>
           </a:xfrm>
           <a:prstGeom prst="rect">
             <a:avLst/>
@@ -5837,14 +6153,124 @@
       </p:sp>
       <p:sp>
         <p:nvSpPr>
-          <p:cNvPr id="54" name="Rounded Rectangle 53"/>
+          <p:cNvPr id="59" name="Rounded Rectangle 58"/>
           <p:cNvSpPr/>
           <p:nvPr/>
         </p:nvSpPr>
         <p:spPr>
           <a:xfrm>
+            <a:off x="2962656" y="6080760"/>
+            <a:ext cx="612648" cy="219456"/>
+          </a:xfrm>
+          <a:prstGeom prst="roundRect">
+            <a:avLst>
+              <a:gd name="adj" fmla="val 50000"/>
+            </a:avLst>
+          </a:prstGeom>
+          <a:solidFill>
+            <a:srgbClr val="1565C0"/>
+          </a:solidFill>
+          <a:ln>
+            <a:noFill/>
+          </a:ln>
+          <a:effectLst/>
+        </p:spPr>
+        <p:style>
+          <a:lnRef idx="1">
+            <a:schemeClr val="accent1"/>
+          </a:lnRef>
+          <a:fillRef idx="3">
+            <a:schemeClr val="accent1"/>
+          </a:fillRef>
+          <a:effectRef idx="2">
+            <a:schemeClr val="accent1"/>
+          </a:effectRef>
+          <a:fontRef idx="minor">
+            <a:schemeClr val="lt1"/>
+          </a:fontRef>
+        </p:style>
+        <p:txBody>
+          <a:bodyPr rtlCol="0" anchor="ctr" lIns="0" rIns="0" tIns="0" bIns="0"/>
+          <a:lstStyle/>
+          <a:p>
+            <a:pPr algn="ctr"/>
+            <a:r>
+              <a:rPr sz="800" b="1">
+                <a:solidFill>
+                  <a:srgbClr val="FFFFFF"/>
+                </a:solidFill>
+                <a:latin typeface="Arial"/>
+              </a:rPr>
+              <a:t>Interna ×2</a:t>
+            </a:r>
+          </a:p>
+        </p:txBody>
+      </p:sp>
+      <p:sp>
+        <p:nvSpPr>
+          <p:cNvPr id="60" name="Rounded Rectangle 59"/>
+          <p:cNvSpPr/>
+          <p:nvPr/>
+        </p:nvSpPr>
+        <p:spPr>
+          <a:xfrm>
+            <a:off x="3621024" y="6080760"/>
+            <a:ext cx="612648" cy="219456"/>
+          </a:xfrm>
+          <a:prstGeom prst="roundRect">
+            <a:avLst>
+              <a:gd name="adj" fmla="val 50000"/>
+            </a:avLst>
+          </a:prstGeom>
+          <a:solidFill>
+            <a:srgbClr val="E8871E"/>
+          </a:solidFill>
+          <a:ln>
+            <a:noFill/>
+          </a:ln>
+          <a:effectLst/>
+        </p:spPr>
+        <p:style>
+          <a:lnRef idx="1">
+            <a:schemeClr val="accent1"/>
+          </a:lnRef>
+          <a:fillRef idx="3">
+            <a:schemeClr val="accent1"/>
+          </a:fillRef>
+          <a:effectRef idx="2">
+            <a:schemeClr val="accent1"/>
+          </a:effectRef>
+          <a:fontRef idx="minor">
+            <a:schemeClr val="lt1"/>
+          </a:fontRef>
+        </p:style>
+        <p:txBody>
+          <a:bodyPr rtlCol="0" anchor="ctr" lIns="0" rIns="0" tIns="0" bIns="0"/>
+          <a:lstStyle/>
+          <a:p>
+            <a:pPr algn="ctr"/>
+            <a:r>
+              <a:rPr sz="800" b="1">
+                <a:solidFill>
+                  <a:srgbClr val="FFFFFF"/>
+                </a:solidFill>
+                <a:latin typeface="Arial"/>
+              </a:rPr>
+              <a:t>Externa ×1</a:t>
+            </a:r>
+          </a:p>
+        </p:txBody>
+      </p:sp>
+      <p:sp>
+        <p:nvSpPr>
+          <p:cNvPr id="61" name="Rounded Rectangle 60"/>
+          <p:cNvSpPr/>
+          <p:nvPr/>
+        </p:nvSpPr>
+        <p:spPr>
+          <a:xfrm>
             <a:off x="5047488" y="4937760"/>
-            <a:ext cx="2112264" cy="1371600"/>
+            <a:ext cx="2112264" cy="1463040"/>
           </a:xfrm>
           <a:prstGeom prst="roundRect">
             <a:avLst>
@@ -5885,7 +6311,7 @@
       </p:sp>
       <p:sp>
         <p:nvSpPr>
-          <p:cNvPr id="55" name="TextBox 54"/>
+          <p:cNvPr id="62" name="TextBox 61"/>
           <p:cNvSpPr txBox="1"/>
           <p:nvPr/>
         </p:nvSpPr>
@@ -5920,7 +6346,7 @@
       </p:sp>
       <p:sp>
         <p:nvSpPr>
-          <p:cNvPr id="56" name="TextBox 55"/>
+          <p:cNvPr id="63" name="TextBox 62"/>
           <p:cNvSpPr txBox="1"/>
           <p:nvPr/>
         </p:nvSpPr>
@@ -5955,14 +6381,14 @@
       </p:sp>
       <p:sp>
         <p:nvSpPr>
-          <p:cNvPr id="57" name="TextBox 56"/>
+          <p:cNvPr id="64" name="TextBox 63"/>
           <p:cNvSpPr txBox="1"/>
           <p:nvPr/>
         </p:nvSpPr>
         <p:spPr>
           <a:xfrm>
-            <a:off x="5212079" y="5614416"/>
-            <a:ext cx="1783080" cy="640080"/>
+            <a:off x="5212079" y="5596128"/>
+            <a:ext cx="1783080" cy="457200"/>
           </a:xfrm>
           <a:prstGeom prst="rect">
             <a:avLst/>
@@ -5990,14 +6416,124 @@
       </p:sp>
       <p:sp>
         <p:nvSpPr>
-          <p:cNvPr id="58" name="Rounded Rectangle 57"/>
+          <p:cNvPr id="65" name="Rounded Rectangle 64"/>
           <p:cNvSpPr/>
           <p:nvPr/>
         </p:nvSpPr>
         <p:spPr>
           <a:xfrm>
+            <a:off x="5212079" y="6080760"/>
+            <a:ext cx="612648" cy="219456"/>
+          </a:xfrm>
+          <a:prstGeom prst="roundRect">
+            <a:avLst>
+              <a:gd name="adj" fmla="val 50000"/>
+            </a:avLst>
+          </a:prstGeom>
+          <a:solidFill>
+            <a:srgbClr val="1565C0"/>
+          </a:solidFill>
+          <a:ln>
+            <a:noFill/>
+          </a:ln>
+          <a:effectLst/>
+        </p:spPr>
+        <p:style>
+          <a:lnRef idx="1">
+            <a:schemeClr val="accent1"/>
+          </a:lnRef>
+          <a:fillRef idx="3">
+            <a:schemeClr val="accent1"/>
+          </a:fillRef>
+          <a:effectRef idx="2">
+            <a:schemeClr val="accent1"/>
+          </a:effectRef>
+          <a:fontRef idx="minor">
+            <a:schemeClr val="lt1"/>
+          </a:fontRef>
+        </p:style>
+        <p:txBody>
+          <a:bodyPr rtlCol="0" anchor="ctr" lIns="0" rIns="0" tIns="0" bIns="0"/>
+          <a:lstStyle/>
+          <a:p>
+            <a:pPr algn="ctr"/>
+            <a:r>
+              <a:rPr sz="800" b="1">
+                <a:solidFill>
+                  <a:srgbClr val="FFFFFF"/>
+                </a:solidFill>
+                <a:latin typeface="Arial"/>
+              </a:rPr>
+              <a:t>Interna ×2</a:t>
+            </a:r>
+          </a:p>
+        </p:txBody>
+      </p:sp>
+      <p:sp>
+        <p:nvSpPr>
+          <p:cNvPr id="66" name="Rounded Rectangle 65"/>
+          <p:cNvSpPr/>
+          <p:nvPr/>
+        </p:nvSpPr>
+        <p:spPr>
+          <a:xfrm>
+            <a:off x="5870447" y="6080760"/>
+            <a:ext cx="612648" cy="219456"/>
+          </a:xfrm>
+          <a:prstGeom prst="roundRect">
+            <a:avLst>
+              <a:gd name="adj" fmla="val 50000"/>
+            </a:avLst>
+          </a:prstGeom>
+          <a:solidFill>
+            <a:srgbClr val="E8871E"/>
+          </a:solidFill>
+          <a:ln>
+            <a:noFill/>
+          </a:ln>
+          <a:effectLst/>
+        </p:spPr>
+        <p:style>
+          <a:lnRef idx="1">
+            <a:schemeClr val="accent1"/>
+          </a:lnRef>
+          <a:fillRef idx="3">
+            <a:schemeClr val="accent1"/>
+          </a:fillRef>
+          <a:effectRef idx="2">
+            <a:schemeClr val="accent1"/>
+          </a:effectRef>
+          <a:fontRef idx="minor">
+            <a:schemeClr val="lt1"/>
+          </a:fontRef>
+        </p:style>
+        <p:txBody>
+          <a:bodyPr rtlCol="0" anchor="ctr" lIns="0" rIns="0" tIns="0" bIns="0"/>
+          <a:lstStyle/>
+          <a:p>
+            <a:pPr algn="ctr"/>
+            <a:r>
+              <a:rPr sz="800" b="1">
+                <a:solidFill>
+                  <a:srgbClr val="FFFFFF"/>
+                </a:solidFill>
+                <a:latin typeface="Arial"/>
+              </a:rPr>
+              <a:t>Externa ×1</a:t>
+            </a:r>
+          </a:p>
+        </p:txBody>
+      </p:sp>
+      <p:sp>
+        <p:nvSpPr>
+          <p:cNvPr id="67" name="Rounded Rectangle 66"/>
+          <p:cNvSpPr/>
+          <p:nvPr/>
+        </p:nvSpPr>
+        <p:spPr>
+          <a:xfrm>
             <a:off x="7296912" y="4937760"/>
-            <a:ext cx="2112264" cy="1371600"/>
+            <a:ext cx="2112264" cy="1463040"/>
           </a:xfrm>
           <a:prstGeom prst="roundRect">
             <a:avLst>
@@ -6038,7 +6574,7 @@
       </p:sp>
       <p:sp>
         <p:nvSpPr>
-          <p:cNvPr id="59" name="TextBox 58"/>
+          <p:cNvPr id="68" name="TextBox 67"/>
           <p:cNvSpPr txBox="1"/>
           <p:nvPr/>
         </p:nvSpPr>
@@ -6073,7 +6609,7 @@
       </p:sp>
       <p:sp>
         <p:nvSpPr>
-          <p:cNvPr id="60" name="TextBox 59"/>
+          <p:cNvPr id="69" name="TextBox 68"/>
           <p:cNvSpPr txBox="1"/>
           <p:nvPr/>
         </p:nvSpPr>
@@ -6108,14 +6644,14 @@
       </p:sp>
       <p:sp>
         <p:nvSpPr>
-          <p:cNvPr id="61" name="TextBox 60"/>
+          <p:cNvPr id="70" name="TextBox 69"/>
           <p:cNvSpPr txBox="1"/>
           <p:nvPr/>
         </p:nvSpPr>
         <p:spPr>
           <a:xfrm>
-            <a:off x="7461504" y="5614416"/>
-            <a:ext cx="1783080" cy="640080"/>
+            <a:off x="7461504" y="5596128"/>
+            <a:ext cx="1783080" cy="457200"/>
           </a:xfrm>
           <a:prstGeom prst="rect">
             <a:avLst/>
@@ -6143,14 +6679,124 @@
       </p:sp>
       <p:sp>
         <p:nvSpPr>
-          <p:cNvPr id="62" name="Rounded Rectangle 61"/>
+          <p:cNvPr id="71" name="Rounded Rectangle 70"/>
           <p:cNvSpPr/>
           <p:nvPr/>
         </p:nvSpPr>
         <p:spPr>
           <a:xfrm>
+            <a:off x="7461504" y="6080760"/>
+            <a:ext cx="612648" cy="219456"/>
+          </a:xfrm>
+          <a:prstGeom prst="roundRect">
+            <a:avLst>
+              <a:gd name="adj" fmla="val 50000"/>
+            </a:avLst>
+          </a:prstGeom>
+          <a:solidFill>
+            <a:srgbClr val="1565C0"/>
+          </a:solidFill>
+          <a:ln>
+            <a:noFill/>
+          </a:ln>
+          <a:effectLst/>
+        </p:spPr>
+        <p:style>
+          <a:lnRef idx="1">
+            <a:schemeClr val="accent1"/>
+          </a:lnRef>
+          <a:fillRef idx="3">
+            <a:schemeClr val="accent1"/>
+          </a:fillRef>
+          <a:effectRef idx="2">
+            <a:schemeClr val="accent1"/>
+          </a:effectRef>
+          <a:fontRef idx="minor">
+            <a:schemeClr val="lt1"/>
+          </a:fontRef>
+        </p:style>
+        <p:txBody>
+          <a:bodyPr rtlCol="0" anchor="ctr" lIns="0" rIns="0" tIns="0" bIns="0"/>
+          <a:lstStyle/>
+          <a:p>
+            <a:pPr algn="ctr"/>
+            <a:r>
+              <a:rPr sz="800" b="1">
+                <a:solidFill>
+                  <a:srgbClr val="FFFFFF"/>
+                </a:solidFill>
+                <a:latin typeface="Arial"/>
+              </a:rPr>
+              <a:t>Interna ×1</a:t>
+            </a:r>
+          </a:p>
+        </p:txBody>
+      </p:sp>
+      <p:sp>
+        <p:nvSpPr>
+          <p:cNvPr id="72" name="Rounded Rectangle 71"/>
+          <p:cNvSpPr/>
+          <p:nvPr/>
+        </p:nvSpPr>
+        <p:spPr>
+          <a:xfrm>
+            <a:off x="8119872" y="6080760"/>
+            <a:ext cx="612648" cy="219456"/>
+          </a:xfrm>
+          <a:prstGeom prst="roundRect">
+            <a:avLst>
+              <a:gd name="adj" fmla="val 50000"/>
+            </a:avLst>
+          </a:prstGeom>
+          <a:solidFill>
+            <a:srgbClr val="E8871E"/>
+          </a:solidFill>
+          <a:ln>
+            <a:noFill/>
+          </a:ln>
+          <a:effectLst/>
+        </p:spPr>
+        <p:style>
+          <a:lnRef idx="1">
+            <a:schemeClr val="accent1"/>
+          </a:lnRef>
+          <a:fillRef idx="3">
+            <a:schemeClr val="accent1"/>
+          </a:fillRef>
+          <a:effectRef idx="2">
+            <a:schemeClr val="accent1"/>
+          </a:effectRef>
+          <a:fontRef idx="minor">
+            <a:schemeClr val="lt1"/>
+          </a:fontRef>
+        </p:style>
+        <p:txBody>
+          <a:bodyPr rtlCol="0" anchor="ctr" lIns="0" rIns="0" tIns="0" bIns="0"/>
+          <a:lstStyle/>
+          <a:p>
+            <a:pPr algn="ctr"/>
+            <a:r>
+              <a:rPr sz="800" b="1">
+                <a:solidFill>
+                  <a:srgbClr val="FFFFFF"/>
+                </a:solidFill>
+                <a:latin typeface="Arial"/>
+              </a:rPr>
+              <a:t>Externa ×1</a:t>
+            </a:r>
+          </a:p>
+        </p:txBody>
+      </p:sp>
+      <p:sp>
+        <p:nvSpPr>
+          <p:cNvPr id="73" name="Rounded Rectangle 72"/>
+          <p:cNvSpPr/>
+          <p:nvPr/>
+        </p:nvSpPr>
+        <p:spPr>
+          <a:xfrm>
             <a:off x="9546336" y="4937760"/>
-            <a:ext cx="2112264" cy="1371600"/>
+            <a:ext cx="2112264" cy="1463040"/>
           </a:xfrm>
           <a:prstGeom prst="roundRect">
             <a:avLst>
@@ -6191,7 +6837,7 @@
       </p:sp>
       <p:sp>
         <p:nvSpPr>
-          <p:cNvPr id="63" name="TextBox 62"/>
+          <p:cNvPr id="74" name="TextBox 73"/>
           <p:cNvSpPr txBox="1"/>
           <p:nvPr/>
         </p:nvSpPr>
@@ -6226,7 +6872,7 @@
       </p:sp>
       <p:sp>
         <p:nvSpPr>
-          <p:cNvPr id="64" name="TextBox 63"/>
+          <p:cNvPr id="75" name="TextBox 74"/>
           <p:cNvSpPr txBox="1"/>
           <p:nvPr/>
         </p:nvSpPr>
@@ -6261,14 +6907,14 @@
       </p:sp>
       <p:sp>
         <p:nvSpPr>
-          <p:cNvPr id="65" name="TextBox 64"/>
+          <p:cNvPr id="76" name="TextBox 75"/>
           <p:cNvSpPr txBox="1"/>
           <p:nvPr/>
         </p:nvSpPr>
         <p:spPr>
           <a:xfrm>
-            <a:off x="9710928" y="5614416"/>
-            <a:ext cx="1783080" cy="640080"/>
+            <a:off x="9710928" y="5596128"/>
+            <a:ext cx="1783080" cy="457200"/>
           </a:xfrm>
           <a:prstGeom prst="rect">
             <a:avLst/>
@@ -6296,7 +6942,117 @@
       </p:sp>
       <p:sp>
         <p:nvSpPr>
-          <p:cNvPr id="66" name="Fuente"/>
+          <p:cNvPr id="77" name="Rounded Rectangle 76"/>
+          <p:cNvSpPr/>
+          <p:nvPr/>
+        </p:nvSpPr>
+        <p:spPr>
+          <a:xfrm>
+            <a:off x="9710928" y="6080760"/>
+            <a:ext cx="612648" cy="219456"/>
+          </a:xfrm>
+          <a:prstGeom prst="roundRect">
+            <a:avLst>
+              <a:gd name="adj" fmla="val 50000"/>
+            </a:avLst>
+          </a:prstGeom>
+          <a:solidFill>
+            <a:srgbClr val="1565C0"/>
+          </a:solidFill>
+          <a:ln>
+            <a:noFill/>
+          </a:ln>
+          <a:effectLst/>
+        </p:spPr>
+        <p:style>
+          <a:lnRef idx="1">
+            <a:schemeClr val="accent1"/>
+          </a:lnRef>
+          <a:fillRef idx="3">
+            <a:schemeClr val="accent1"/>
+          </a:fillRef>
+          <a:effectRef idx="2">
+            <a:schemeClr val="accent1"/>
+          </a:effectRef>
+          <a:fontRef idx="minor">
+            <a:schemeClr val="lt1"/>
+          </a:fontRef>
+        </p:style>
+        <p:txBody>
+          <a:bodyPr rtlCol="0" anchor="ctr" lIns="0" rIns="0" tIns="0" bIns="0"/>
+          <a:lstStyle/>
+          <a:p>
+            <a:pPr algn="ctr"/>
+            <a:r>
+              <a:rPr sz="800" b="1">
+                <a:solidFill>
+                  <a:srgbClr val="FFFFFF"/>
+                </a:solidFill>
+                <a:latin typeface="Arial"/>
+              </a:rPr>
+              <a:t>Interna ×1</a:t>
+            </a:r>
+          </a:p>
+        </p:txBody>
+      </p:sp>
+      <p:sp>
+        <p:nvSpPr>
+          <p:cNvPr id="78" name="Rounded Rectangle 77"/>
+          <p:cNvSpPr/>
+          <p:nvPr/>
+        </p:nvSpPr>
+        <p:spPr>
+          <a:xfrm>
+            <a:off x="10369296" y="6080760"/>
+            <a:ext cx="411480" cy="219456"/>
+          </a:xfrm>
+          <a:prstGeom prst="roundRect">
+            <a:avLst>
+              <a:gd name="adj" fmla="val 50000"/>
+            </a:avLst>
+          </a:prstGeom>
+          <a:solidFill>
+            <a:srgbClr val="2E9E5B"/>
+          </a:solidFill>
+          <a:ln>
+            <a:noFill/>
+          </a:ln>
+          <a:effectLst/>
+        </p:spPr>
+        <p:style>
+          <a:lnRef idx="1">
+            <a:schemeClr val="accent1"/>
+          </a:lnRef>
+          <a:fillRef idx="3">
+            <a:schemeClr val="accent1"/>
+          </a:fillRef>
+          <a:effectRef idx="2">
+            <a:schemeClr val="accent1"/>
+          </a:effectRef>
+          <a:fontRef idx="minor">
+            <a:schemeClr val="lt1"/>
+          </a:fontRef>
+        </p:style>
+        <p:txBody>
+          <a:bodyPr rtlCol="0" anchor="ctr" lIns="0" rIns="0" tIns="0" bIns="0"/>
+          <a:lstStyle/>
+          <a:p>
+            <a:pPr algn="ctr"/>
+            <a:r>
+              <a:rPr sz="800" b="1">
+                <a:solidFill>
+                  <a:srgbClr val="FFFFFF"/>
+                </a:solidFill>
+                <a:latin typeface="Arial"/>
+              </a:rPr>
+              <a:t>SSF ×1</a:t>
+            </a:r>
+          </a:p>
+        </p:txBody>
+      </p:sp>
+      <p:sp>
+        <p:nvSpPr>
+          <p:cNvPr id="79" name="Fuente"/>
           <p:cNvSpPr txBox="1"/>
           <p:nvPr/>
         </p:nvSpPr>
